--- a/slides/CSC270-Lecture-17-Midterm-Review.pptx
+++ b/slides/CSC270-Lecture-17-Midterm-Review.pptx
@@ -18,6 +18,7 @@
     <p:sldId id="266" r:id="rId12"/>
     <p:sldId id="267" r:id="rId13"/>
     <p:sldId id="268" r:id="rId14"/>
+    <p:sldId id="271" r:id="rId22"/>
     <p:sldId id="269" r:id="rId15"/>
     <p:sldId id="270" r:id="rId16"/>
   </p:sldIdLst>
@@ -2227,7 +2228,7 @@
               <a:buNone/>
             </a:pPr>
             <a:r>
-              <a:rPr lang="en-US" sz="1600" dirty="0">
+              <a:rPr lang="en-US" sz="1800" dirty="0">
                 <a:solidFill>
                   <a:srgbClr val="2FE6C4"/>
                 </a:solidFill>
@@ -2266,7 +2267,7 @@
               <a:buNone/>
             </a:pPr>
             <a:r>
-              <a:rPr lang="en-US" sz="1400" dirty="0">
+              <a:rPr lang="en-US" sz="1800" dirty="0">
                 <a:solidFill>
                   <a:srgbClr val="B9BFC6"/>
                 </a:solidFill>
@@ -2305,7 +2306,7 @@
               <a:buNone/>
             </a:pPr>
             <a:r>
-              <a:rPr lang="en-US" sz="1200" dirty="0">
+              <a:rPr lang="en-US" sz="1800" dirty="0">
                 <a:solidFill>
                   <a:srgbClr val="757C84"/>
                 </a:solidFill>
@@ -2344,7 +2345,7 @@
               <a:buNone/>
             </a:pPr>
             <a:r>
-              <a:rPr lang="en-US" sz="1000" u="sng" dirty="0">
+              <a:rPr lang="en-US" sz="1200" u="sng" dirty="0">
                 <a:solidFill>
                   <a:srgbClr val="8A939B"/>
                 </a:solidFill>
@@ -2365,7 +2366,7 @@
               <a:buNone/>
             </a:pPr>
             <a:r>
-              <a:rPr lang="en-US" sz="1000" dirty="0">
+              <a:rPr lang="en-US" sz="1200" dirty="0">
                 <a:solidFill>
                   <a:srgbClr val="8A939B"/>
                 </a:solidFill>
@@ -2510,6 +2511,10 @@
           </a:solidFill>
           <a:ln/>
         </p:spPr>
+        <p:txBody>
+          <a:bodyPr/>
+          <a:p/>
+        </p:txBody>
       </p:sp>
       <p:sp>
         <p:nvSpPr>
@@ -2536,7 +2541,7 @@
               <a:buNone/>
             </a:pPr>
             <a:r>
-              <a:rPr lang="en-US" sz="1400" b="1" dirty="0">
+              <a:rPr lang="en-US" sz="1800" b="1" dirty="0">
                 <a:solidFill>
                   <a:srgbClr val="14181C"/>
                 </a:solidFill>
@@ -2575,7 +2580,7 @@
               <a:buNone/>
             </a:pPr>
             <a:r>
-              <a:rPr lang="en-US" sz="1150" dirty="0">
+              <a:rPr lang="en-US" sz="1800" dirty="0">
                 <a:solidFill>
                   <a:srgbClr val="20242A"/>
                 </a:solidFill>
@@ -2583,7 +2588,7 @@
                 <a:ea typeface="Calibri" pitchFamily="34" charset="-122"/>
                 <a:cs typeface="Calibri" pitchFamily="34" charset="-120"/>
               </a:rPr>
-              <a:t>Single Staff(staffNo,...,staffType,bonus,trainingLevel); unused attrs NULL per row. Best: disjoint + total, few subclasses</a:t>
+              <a:t>Staff(staffNo,...,staffType,bonus,trainingLevel); NULLs. Best: disjoint + total.</a:t>
             </a:r>
             <a:endParaRPr lang="en-US" sz="1150" dirty="0"/>
           </a:p>
@@ -2612,6 +2617,10 @@
             <a:tailEnd type="triangle"/>
           </a:ln>
         </p:spPr>
+        <p:txBody>
+          <a:bodyPr/>
+          <a:p/>
+        </p:txBody>
       </p:sp>
       <p:sp>
         <p:nvSpPr>
@@ -2634,6 +2643,10 @@
           </a:solidFill>
           <a:ln/>
         </p:spPr>
+        <p:txBody>
+          <a:bodyPr/>
+          <a:p/>
+        </p:txBody>
       </p:sp>
       <p:sp>
         <p:nvSpPr>
@@ -2660,7 +2673,7 @@
               <a:buNone/>
             </a:pPr>
             <a:r>
-              <a:rPr lang="en-US" sz="1400" b="1" dirty="0">
+              <a:rPr lang="en-US" sz="1800" b="1" dirty="0">
                 <a:solidFill>
                   <a:srgbClr val="14181C"/>
                 </a:solidFill>
@@ -2699,7 +2712,7 @@
               <a:buNone/>
             </a:pPr>
             <a:r>
-              <a:rPr lang="en-US" sz="1150" dirty="0">
+              <a:rPr lang="en-US" sz="1800" dirty="0">
                 <a:solidFill>
                   <a:srgbClr val="20242A"/>
                 </a:solidFill>
@@ -2707,7 +2720,7 @@
                 <a:ea typeface="Calibri" pitchFamily="34" charset="-122"/>
                 <a:cs typeface="Calibri" pitchFamily="34" charset="-120"/>
               </a:rPr>
-              <a:t>Manager(staffNo,...,bonus), Assistant(staffNo,...,trainingLevel) — no Staff relation. Best: disjoint + total ONLY</a:t>
+              <a:t>Manager(staffNo,...,bonus), Assistant(...). No Staff table. Best: disjoint + total only.</a:t>
             </a:r>
             <a:endParaRPr lang="en-US" sz="1150" dirty="0"/>
           </a:p>
@@ -2736,6 +2749,10 @@
             <a:tailEnd type="triangle"/>
           </a:ln>
         </p:spPr>
+        <p:txBody>
+          <a:bodyPr/>
+          <a:p/>
+        </p:txBody>
       </p:sp>
       <p:sp>
         <p:nvSpPr>
@@ -2758,6 +2775,10 @@
           </a:solidFill>
           <a:ln/>
         </p:spPr>
+        <p:txBody>
+          <a:bodyPr/>
+          <a:p/>
+        </p:txBody>
       </p:sp>
       <p:sp>
         <p:nvSpPr>
@@ -2784,7 +2805,7 @@
               <a:buNone/>
             </a:pPr>
             <a:r>
-              <a:rPr lang="en-US" sz="1400" b="1" dirty="0">
+              <a:rPr lang="en-US" sz="1800" b="1" dirty="0">
                 <a:solidFill>
                   <a:srgbClr val="14181C"/>
                 </a:solidFill>
@@ -2823,7 +2844,7 @@
               <a:buNone/>
             </a:pPr>
             <a:r>
-              <a:rPr lang="en-US" sz="1150" dirty="0">
+              <a:rPr lang="en-US" sz="1800" dirty="0">
                 <a:solidFill>
                   <a:srgbClr val="20242A"/>
                 </a:solidFill>
@@ -2831,7 +2852,7 @@
                 <a:ea typeface="Calibri" pitchFamily="34" charset="-122"/>
                 <a:cs typeface="Calibri" pitchFamily="34" charset="-120"/>
               </a:rPr>
-              <a:t>Staff(staffNo,...); Manager(staffNo,bonus); Assistant(staffNo,trainingLevel). Best: overlapping, or partial — always works</a:t>
+              <a:t>Staff + Manager(staffNo,bonus) + Assistant(staffNo,...). Best: overlapping or partial.</a:t>
             </a:r>
             <a:endParaRPr lang="en-US" sz="1150" dirty="0"/>
           </a:p>
@@ -2846,7 +2867,7 @@
         <p:spPr>
           <a:xfrm>
             <a:off x="640080" y="5166360"/>
-            <a:ext cx="10911535" cy="960120"/>
+            <a:ext cx="10911535" cy="800000"/>
           </a:xfrm>
           <a:prstGeom prst="roundRect">
             <a:avLst>
@@ -2863,6 +2884,10 @@
             <a:prstDash val="solid"/>
           </a:ln>
         </p:spPr>
+        <p:txBody>
+          <a:bodyPr/>
+          <a:p/>
+        </p:txBody>
       </p:sp>
       <p:sp>
         <p:nvSpPr>
@@ -2872,7 +2897,7 @@
         </p:nvSpPr>
         <p:spPr>
           <a:xfrm>
-            <a:off x="896112" y="5312664"/>
+            <a:off x="896112" y="5230000"/>
             <a:ext cx="10399471" cy="274320"/>
           </a:xfrm>
           <a:prstGeom prst="rect">
@@ -2889,7 +2914,7 @@
               <a:buNone/>
             </a:pPr>
             <a:r>
-              <a:rPr lang="en-US" sz="1100" b="1" spc="200" kern="0" dirty="0">
+              <a:rPr lang="en-US" sz="1200" b="1" spc="200" kern="0" dirty="0">
                 <a:solidFill>
                   <a:srgbClr val="8A5A12"/>
                 </a:solidFill>
@@ -2911,8 +2936,8 @@
         </p:nvSpPr>
         <p:spPr>
           <a:xfrm>
-            <a:off x="896112" y="5623560"/>
-            <a:ext cx="10399471" cy="338328"/>
+            <a:off x="896112" y="5500000"/>
+            <a:ext cx="10399471" cy="500000"/>
           </a:xfrm>
           <a:prstGeom prst="rect">
             <a:avLst/>
@@ -2931,7 +2956,7 @@
               <a:buNone/>
             </a:pPr>
             <a:r>
-              <a:rPr lang="en-US" sz="1300" dirty="0">
+              <a:rPr lang="en-US" sz="1800" dirty="0">
                 <a:solidFill>
                   <a:srgbClr val="1F2429"/>
                 </a:solidFill>
@@ -2939,7 +2964,7 @@
                 <a:ea typeface="Calibri" pitchFamily="34" charset="-122"/>
                 <a:cs typeface="Calibri" pitchFamily="34" charset="-120"/>
               </a:rPr>
-              <a:t>Option B has no relation to hold a Staff row belonging to NO subclass — breaks under partial specialization. Option C always works, at the cost of an extra join.</a:t>
+              <a:t>Option B breaks under partial specialization; Option C always works.</a:t>
             </a:r>
             <a:endParaRPr lang="en-US" sz="1300" dirty="0"/>
           </a:p>
@@ -2970,7 +2995,7 @@
               <a:buNone/>
             </a:pPr>
             <a:r>
-              <a:rPr lang="en-US" sz="1000" u="sng" dirty="0">
+              <a:rPr lang="en-US" sz="1200" u="sng" dirty="0">
                 <a:solidFill>
                   <a:srgbClr val="8A939B"/>
                 </a:solidFill>
@@ -2991,7 +3016,7 @@
               <a:buNone/>
             </a:pPr>
             <a:r>
-              <a:rPr lang="en-US" sz="1000" dirty="0">
+              <a:rPr lang="en-US" sz="1200" dirty="0">
                 <a:solidFill>
                   <a:srgbClr val="8A939B"/>
                 </a:solidFill>
@@ -3147,7 +3172,7 @@
               <a:buChar char="•"/>
             </a:pPr>
             <a:r>
-              <a:rPr lang="en-US" sz="1450" dirty="0">
+              <a:rPr lang="en-US" sz="1800" dirty="0">
                 <a:solidFill>
                   <a:srgbClr val="1F2429"/>
                 </a:solidFill>
@@ -3171,7 +3196,7 @@
               <a:buChar char="•"/>
             </a:pPr>
             <a:r>
-              <a:rPr lang="en-US" sz="1450" dirty="0">
+              <a:rPr lang="en-US" sz="1800" dirty="0">
                 <a:solidFill>
                   <a:srgbClr val="1F2429"/>
                 </a:solidFill>
@@ -3195,7 +3220,7 @@
               <a:buChar char="•"/>
             </a:pPr>
             <a:r>
-              <a:rPr lang="en-US" sz="1450" dirty="0">
+              <a:rPr lang="en-US" sz="1800" dirty="0">
                 <a:solidFill>
                   <a:srgbClr val="1F2429"/>
                 </a:solidFill>
@@ -3230,6 +3255,10 @@
           </a:solidFill>
           <a:ln/>
         </p:spPr>
+        <p:txBody>
+          <a:bodyPr/>
+          <a:p/>
+        </p:txBody>
       </p:sp>
       <p:sp>
         <p:nvSpPr>
@@ -3259,11 +3288,11 @@
               <a:buNone/>
             </a:pPr>
             <a:r>
-              <a:rPr lang="en-US" sz="1300" dirty="0">
+              <a:rPr lang="en-US" sz="1800" dirty="0">
                 <a:solidFill>
                   <a:srgbClr val="FFFFFF"/>
                 </a:solidFill>
-                <a:latin typeface="Courier New" pitchFamily="34" charset="0"/>
+                <a:latin typeface="Calibri" pitchFamily="34" charset="0"/>
                 <a:ea typeface="Courier New" pitchFamily="34" charset="-122"/>
                 <a:cs typeface="Courier New" pitchFamily="34" charset="-120"/>
               </a:rPr>
@@ -3279,11 +3308,11 @@
               <a:buNone/>
             </a:pPr>
             <a:r>
-              <a:rPr lang="en-US" sz="1300" dirty="0">
+              <a:rPr lang="en-US" sz="1800" dirty="0">
                 <a:solidFill>
                   <a:srgbClr val="FFFFFF"/>
                 </a:solidFill>
-                <a:latin typeface="Courier New" pitchFamily="34" charset="0"/>
+                <a:latin typeface="Calibri" pitchFamily="34" charset="0"/>
                 <a:ea typeface="Courier New" pitchFamily="34" charset="-122"/>
                 <a:cs typeface="Courier New" pitchFamily="34" charset="-120"/>
               </a:rPr>
@@ -3318,7 +3347,7 @@
               <a:buNone/>
             </a:pPr>
             <a:r>
-              <a:rPr lang="en-US" sz="1000" u="sng" dirty="0">
+              <a:rPr lang="en-US" sz="1200" u="sng" dirty="0">
                 <a:solidFill>
                   <a:srgbClr val="8A939B"/>
                 </a:solidFill>
@@ -3339,7 +3368,7 @@
               <a:buNone/>
             </a:pPr>
             <a:r>
-              <a:rPr lang="en-US" sz="1000" dirty="0">
+              <a:rPr lang="en-US" sz="1200" dirty="0">
                 <a:solidFill>
                   <a:srgbClr val="8A939B"/>
                 </a:solidFill>
@@ -3418,7 +3447,7 @@
                 <a:ea typeface="Calibri" pitchFamily="34" charset="-122"/>
                 <a:cs typeface="Calibri" pitchFamily="34" charset="-120"/>
               </a:rPr>
-              <a:t>SELF-TEST · 1 OF 3</a:t>
+              <a:t>SELF-TEST · 1 OF 4</a:t>
             </a:r>
             <a:endParaRPr lang="en-US" sz="1250" dirty="0"/>
           </a:p>
@@ -3508,7 +3537,7 @@
               <a:buNone/>
             </a:pPr>
             <a:r>
-              <a:rPr lang="en-US" sz="1300" dirty="0">
+              <a:rPr lang="en-US" sz="1800" dirty="0">
                 <a:solidFill>
                   <a:srgbClr val="1F2429"/>
                 </a:solidFill>
@@ -3548,6 +3577,10 @@
             <a:prstDash val="solid"/>
           </a:ln>
         </p:spPr>
+        <p:txBody>
+          <a:bodyPr/>
+          <a:p/>
+        </p:txBody>
       </p:sp>
       <p:sp>
         <p:nvSpPr>
@@ -3577,7 +3610,7 @@
               <a:buNone/>
             </a:pPr>
             <a:r>
-              <a:rPr lang="en-US" sz="1200" dirty="0">
+              <a:rPr lang="en-US" sz="1800" dirty="0">
                 <a:solidFill>
                   <a:srgbClr val="1F2429"/>
                 </a:solidFill>
@@ -3636,7 +3669,7 @@
               <a:buNone/>
             </a:pPr>
             <a:r>
-              <a:rPr lang="en-US" sz="1300" dirty="0">
+              <a:rPr lang="en-US" sz="1800" dirty="0">
                 <a:solidFill>
                   <a:srgbClr val="1F2429"/>
                 </a:solidFill>
@@ -3676,6 +3709,10 @@
             <a:prstDash val="solid"/>
           </a:ln>
         </p:spPr>
+        <p:txBody>
+          <a:bodyPr/>
+          <a:p/>
+        </p:txBody>
       </p:sp>
       <p:sp>
         <p:nvSpPr>
@@ -3705,7 +3742,7 @@
               <a:buNone/>
             </a:pPr>
             <a:r>
-              <a:rPr lang="en-US" sz="1200" dirty="0">
+              <a:rPr lang="en-US" sz="1800" dirty="0">
                 <a:solidFill>
                   <a:srgbClr val="1F2429"/>
                 </a:solidFill>
@@ -3744,7 +3781,7 @@
               <a:buNone/>
             </a:pPr>
             <a:r>
-              <a:rPr lang="en-US" sz="1000" u="sng" dirty="0">
+              <a:rPr lang="en-US" sz="1200" u="sng" dirty="0">
                 <a:solidFill>
                   <a:srgbClr val="8A939B"/>
                 </a:solidFill>
@@ -3765,7 +3802,7 @@
               <a:buNone/>
             </a:pPr>
             <a:r>
-              <a:rPr lang="en-US" sz="1000" dirty="0">
+              <a:rPr lang="en-US" sz="1200" dirty="0">
                 <a:solidFill>
                   <a:srgbClr val="8A939B"/>
                 </a:solidFill>
@@ -3844,7 +3881,7 @@
                 <a:ea typeface="Calibri" pitchFamily="34" charset="-122"/>
                 <a:cs typeface="Calibri" pitchFamily="34" charset="-120"/>
               </a:rPr>
-              <a:t>SELF-TEST · 2 OF 3</a:t>
+              <a:t>SELF-TEST · 2 OF 4</a:t>
             </a:r>
             <a:endParaRPr lang="en-US" sz="1250" dirty="0"/>
           </a:p>
@@ -3934,7 +3971,7 @@
               <a:buNone/>
             </a:pPr>
             <a:r>
-              <a:rPr lang="en-US" sz="1300" dirty="0">
+              <a:rPr lang="en-US" sz="1800" dirty="0">
                 <a:solidFill>
                   <a:srgbClr val="1F2429"/>
                 </a:solidFill>
@@ -3974,6 +4011,10 @@
             <a:prstDash val="solid"/>
           </a:ln>
         </p:spPr>
+        <p:txBody>
+          <a:bodyPr/>
+          <a:p/>
+        </p:txBody>
       </p:sp>
       <p:sp>
         <p:nvSpPr>
@@ -4003,7 +4044,7 @@
               <a:buNone/>
             </a:pPr>
             <a:r>
-              <a:rPr lang="en-US" sz="1200" dirty="0">
+              <a:rPr lang="en-US" sz="1800" dirty="0">
                 <a:solidFill>
                   <a:srgbClr val="1F2429"/>
                 </a:solidFill>
@@ -4062,7 +4103,7 @@
               <a:buNone/>
             </a:pPr>
             <a:r>
-              <a:rPr lang="en-US" sz="1300" dirty="0">
+              <a:rPr lang="en-US" sz="1800" dirty="0">
                 <a:solidFill>
                   <a:srgbClr val="1F2429"/>
                 </a:solidFill>
@@ -4102,6 +4143,10 @@
             <a:prstDash val="solid"/>
           </a:ln>
         </p:spPr>
+        <p:txBody>
+          <a:bodyPr/>
+          <a:p/>
+        </p:txBody>
       </p:sp>
       <p:sp>
         <p:nvSpPr>
@@ -4131,7 +4176,7 @@
               <a:buNone/>
             </a:pPr>
             <a:r>
-              <a:rPr lang="en-US" sz="1200" dirty="0">
+              <a:rPr lang="en-US" sz="1800" dirty="0">
                 <a:solidFill>
                   <a:srgbClr val="1F2429"/>
                 </a:solidFill>
@@ -4170,7 +4215,7 @@
               <a:buNone/>
             </a:pPr>
             <a:r>
-              <a:rPr lang="en-US" sz="1000" u="sng" dirty="0">
+              <a:rPr lang="en-US" sz="1200" u="sng" dirty="0">
                 <a:solidFill>
                   <a:srgbClr val="8A939B"/>
                 </a:solidFill>
@@ -4191,7 +4236,7 @@
               <a:buNone/>
             </a:pPr>
             <a:r>
-              <a:rPr lang="en-US" sz="1000" dirty="0">
+              <a:rPr lang="en-US" sz="1200" dirty="0">
                 <a:solidFill>
                   <a:srgbClr val="8A939B"/>
                 </a:solidFill>
@@ -4214,6 +4259,440 @@
 </file>
 
 <file path=ppt/slides/slide14.xml><?xml version="1.0" encoding="utf-8"?>
+<p:sld xmlns:a="http://schemas.openxmlformats.org/drawingml/2006/main" xmlns:r="http://schemas.openxmlformats.org/officeDocument/2006/relationships" xmlns:p="http://schemas.openxmlformats.org/presentationml/2006/main">
+  <p:cSld name="Slide 13">
+    <p:bg>
+      <p:bgPr>
+        <a:solidFill>
+          <a:srgbClr val="F7F8F9"/>
+        </a:solidFill>
+      </p:bgPr>
+    </p:bg>
+    <p:spTree>
+      <p:nvGrpSpPr>
+        <p:cNvPr id="1" name=""/>
+        <p:cNvGrpSpPr/>
+        <p:nvPr/>
+      </p:nvGrpSpPr>
+      <p:grpSpPr>
+        <a:xfrm>
+          <a:off x="0" y="0"/>
+          <a:ext cx="0" cy="0"/>
+          <a:chOff x="0" y="0"/>
+          <a:chExt cx="0" cy="0"/>
+        </a:xfrm>
+      </p:grpSpPr>
+      <p:sp>
+        <p:nvSpPr>
+          <p:cNvPr id="2" name="Text 0"/>
+          <p:cNvSpPr txBox="1"/>
+          <p:nvPr/>
+        </p:nvSpPr>
+        <p:spPr>
+          <a:xfrm>
+            <a:off x="640080" y="384048"/>
+            <a:ext cx="10911535" cy="320040"/>
+          </a:xfrm>
+          <a:prstGeom prst="rect">
+            <a:avLst/>
+          </a:prstGeom>
+          <a:noFill/>
+          <a:ln/>
+        </p:spPr>
+        <p:txBody>
+          <a:bodyPr wrap="square" lIns="0" tIns="0" rIns="0" bIns="0" rtlCol="0" anchor="ctr"/>
+          <a:lstStyle/>
+          <a:p>
+            <a:pPr indent="0" marL="0">
+              <a:buNone/>
+            </a:pPr>
+            <a:r>
+              <a:rPr lang="en-US" sz="1250" b="1" spc="250" kern="0" dirty="0">
+                <a:solidFill>
+                  <a:srgbClr val="8B7FD9"/>
+                </a:solidFill>
+                <a:latin typeface="Calibri" pitchFamily="34" charset="0"/>
+                <a:ea typeface="Calibri" pitchFamily="34" charset="-122"/>
+                <a:cs typeface="Calibri" pitchFamily="34" charset="-120"/>
+              </a:rPr>
+              <a:t>SELF-TEST · 3 OF 4</a:t>
+            </a:r>
+            <a:endParaRPr lang="en-US" sz="1250" dirty="0"/>
+          </a:p>
+        </p:txBody>
+      </p:sp>
+      <p:sp>
+        <p:nvSpPr>
+          <p:cNvPr id="3" name="Text 1"/>
+          <p:cNvSpPr txBox="1"/>
+          <p:nvPr/>
+        </p:nvSpPr>
+        <p:spPr>
+          <a:xfrm>
+            <a:off x="640080" y="713232"/>
+            <a:ext cx="10911535" cy="777240"/>
+          </a:xfrm>
+          <a:prstGeom prst="rect">
+            <a:avLst/>
+          </a:prstGeom>
+          <a:noFill/>
+          <a:ln/>
+        </p:spPr>
+        <p:txBody>
+          <a:bodyPr wrap="square" lIns="0" tIns="0" rIns="0" bIns="0" rtlCol="0" anchor="ctr"/>
+          <a:lstStyle/>
+          <a:p>
+            <a:pPr indent="0" marL="0">
+              <a:buNone/>
+            </a:pPr>
+            <a:r>
+              <a:rPr lang="en-US" sz="2600" b="1" dirty="0">
+                <a:solidFill>
+                  <a:srgbClr val="1F2429"/>
+                </a:solidFill>
+                <a:latin typeface="Calibri" pitchFamily="34" charset="0"/>
+                <a:ea typeface="Calibri" pitchFamily="34" charset="-122"/>
+                <a:cs typeface="Calibri" pitchFamily="34" charset="-120"/>
+              </a:rPr>
+              <a:t>Division and Safe Expressions</a:t>
+            </a:r>
+            <a:endParaRPr lang="en-US" sz="2600" dirty="0"/>
+          </a:p>
+        </p:txBody>
+      </p:sp>
+      <p:sp>
+        <p:nvSpPr>
+          <p:cNvPr id="4" name="Text 2"/>
+          <p:cNvSpPr txBox="1"/>
+          <p:nvPr/>
+        </p:nvSpPr>
+        <p:spPr>
+          <a:xfrm>
+            <a:off x="640080" y="1463040"/>
+            <a:ext cx="10911535" cy="457200"/>
+          </a:xfrm>
+          <a:prstGeom prst="rect">
+            <a:avLst/>
+          </a:prstGeom>
+          <a:noFill/>
+          <a:ln/>
+        </p:spPr>
+        <p:txBody>
+          <a:bodyPr wrap="square" lIns="0" tIns="0" rIns="0" bIns="0" rtlCol="0" anchor="t"/>
+          <a:lstStyle/>
+          <a:p>
+            <a:pPr indent="0" marL="0">
+              <a:lnSpc>
+                <a:spcPct val="115000"/>
+              </a:lnSpc>
+              <a:buNone/>
+            </a:pPr>
+            <a:r>
+              <a:rPr lang="en-US" sz="1800" b="1" dirty="0">
+                <a:solidFill>
+                  <a:srgbClr val="1F2429"/>
+                </a:solidFill>
+                <a:latin typeface="Calibri" pitchFamily="34" charset="0"/>
+                <a:ea typeface="Calibri" pitchFamily="34" charset="-122"/>
+                <a:cs typeface="Calibri" pitchFamily="34" charset="-120"/>
+              </a:rPr>
+              <a:t>Q6.  What question does DIVISION (÷) answer that SELECT/JOIN struggles to express?</a:t>
+            </a:r>
+            <a:pPr indent="0" marL="0">
+              <a:lnSpc>
+                <a:spcPct val="115000"/>
+              </a:lnSpc>
+              <a:buNone/>
+            </a:pPr>
+            <a:r>
+              <a:rPr lang="en-US" sz="1800" dirty="0">
+                <a:solidFill>
+                  <a:srgbClr val="1F2429"/>
+                </a:solidFill>
+                <a:latin typeface="Calibri" pitchFamily="34" charset="0"/>
+                <a:ea typeface="Calibri" pitchFamily="34" charset="-122"/>
+                <a:cs typeface="Calibri" pitchFamily="34" charset="-120"/>
+              </a:rPr>
+              <a:t/>
+            </a:r>
+            <a:endParaRPr lang="en-US" sz="1300" dirty="0"/>
+          </a:p>
+        </p:txBody>
+      </p:sp>
+      <p:sp>
+        <p:nvSpPr>
+          <p:cNvPr id="5" name="Shape 3"/>
+          <p:cNvSpPr/>
+          <p:nvPr/>
+        </p:nvSpPr>
+        <p:spPr>
+          <a:xfrm>
+            <a:off x="640080" y="1920240"/>
+            <a:ext cx="10911535" cy="1051560"/>
+          </a:xfrm>
+          <a:prstGeom prst="roundRect">
+            <a:avLst>
+              <a:gd name="adj" fmla="val 6957"/>
+            </a:avLst>
+          </a:prstGeom>
+          <a:solidFill>
+            <a:srgbClr val="EDF7F4"/>
+          </a:solidFill>
+          <a:ln w="12700">
+            <a:solidFill>
+              <a:srgbClr val="2FE6C4"/>
+            </a:solidFill>
+            <a:prstDash val="solid"/>
+          </a:ln>
+        </p:spPr>
+        <p:txBody>
+          <a:bodyPr/>
+          <a:p/>
+        </p:txBody>
+      </p:sp>
+      <p:sp>
+        <p:nvSpPr>
+          <p:cNvPr id="6" name="Text 4"/>
+          <p:cNvSpPr txBox="1"/>
+          <p:nvPr/>
+        </p:nvSpPr>
+        <p:spPr>
+          <a:xfrm>
+            <a:off x="868680" y="2029968"/>
+            <a:ext cx="10454335" cy="832104"/>
+          </a:xfrm>
+          <a:prstGeom prst="rect">
+            <a:avLst/>
+          </a:prstGeom>
+          <a:noFill/>
+          <a:ln/>
+        </p:spPr>
+        <p:txBody>
+          <a:bodyPr wrap="square" lIns="0" tIns="0" rIns="0" bIns="0" rtlCol="0" anchor="t"/>
+          <a:lstStyle/>
+          <a:p>
+            <a:pPr indent="0" marL="0">
+              <a:lnSpc>
+                <a:spcPct val="115000"/>
+              </a:lnSpc>
+              <a:buNone/>
+            </a:pPr>
+            <a:r>
+              <a:rPr lang="en-US" sz="1800" dirty="0">
+                <a:solidFill>
+                  <a:srgbClr val="1F2429"/>
+                </a:solidFill>
+                <a:latin typeface="Calibri" pitchFamily="34" charset="0"/>
+                <a:ea typeface="Calibri" pitchFamily="34" charset="-122"/>
+                <a:cs typeface="Calibri" pitchFamily="34" charset="-120"/>
+              </a:rPr>
+              <a:t>Division answers "for every" questions, e.g. find every client who has viewed every property managed by branch B003. It returns exactly the clients whose viewed set contains the whole divisor set.</a:t>
+            </a:r>
+            <a:endParaRPr lang="en-US" sz="1200" dirty="0"/>
+          </a:p>
+        </p:txBody>
+      </p:sp>
+      <p:sp>
+        <p:nvSpPr>
+          <p:cNvPr id="7" name="Text 5"/>
+          <p:cNvSpPr txBox="1"/>
+          <p:nvPr/>
+        </p:nvSpPr>
+        <p:spPr>
+          <a:xfrm>
+            <a:off x="640080" y="3246120"/>
+            <a:ext cx="10911535" cy="594360"/>
+          </a:xfrm>
+          <a:prstGeom prst="rect">
+            <a:avLst/>
+          </a:prstGeom>
+          <a:noFill/>
+          <a:ln/>
+        </p:spPr>
+        <p:txBody>
+          <a:bodyPr wrap="square" lIns="0" tIns="0" rIns="0" bIns="0" rtlCol="0" anchor="t"/>
+          <a:lstStyle/>
+          <a:p>
+            <a:pPr indent="0" marL="0">
+              <a:lnSpc>
+                <a:spcPct val="115000"/>
+              </a:lnSpc>
+              <a:buNone/>
+            </a:pPr>
+            <a:r>
+              <a:rPr lang="en-US" sz="1800" b="1" dirty="0">
+                <a:solidFill>
+                  <a:srgbClr val="1F2429"/>
+                </a:solidFill>
+                <a:latin typeface="Calibri" pitchFamily="34" charset="0"/>
+                <a:ea typeface="Calibri" pitchFamily="34" charset="-122"/>
+                <a:cs typeface="Calibri" pitchFamily="34" charset="-120"/>
+              </a:rPr>
+              <a:t>Q7.  Why must relational calculus expressions be safe?</a:t>
+            </a:r>
+            <a:pPr indent="0" marL="0">
+              <a:lnSpc>
+                <a:spcPct val="115000"/>
+              </a:lnSpc>
+              <a:buNone/>
+            </a:pPr>
+            <a:r>
+              <a:rPr lang="en-US" sz="1800" dirty="0">
+                <a:solidFill>
+                  <a:srgbClr val="1F2429"/>
+                </a:solidFill>
+                <a:latin typeface="Calibri" pitchFamily="34" charset="0"/>
+                <a:ea typeface="Calibri" pitchFamily="34" charset="-122"/>
+                <a:cs typeface="Calibri" pitchFamily="34" charset="-120"/>
+              </a:rPr>
+              <a:t/>
+            </a:r>
+            <a:endParaRPr lang="en-US" sz="1300" dirty="0"/>
+          </a:p>
+        </p:txBody>
+      </p:sp>
+      <p:sp>
+        <p:nvSpPr>
+          <p:cNvPr id="8" name="Shape 6"/>
+          <p:cNvSpPr/>
+          <p:nvPr/>
+        </p:nvSpPr>
+        <p:spPr>
+          <a:xfrm>
+            <a:off x="640080" y="3840480"/>
+            <a:ext cx="10911535" cy="1051560"/>
+          </a:xfrm>
+          <a:prstGeom prst="roundRect">
+            <a:avLst>
+              <a:gd name="adj" fmla="val 6957"/>
+            </a:avLst>
+          </a:prstGeom>
+          <a:solidFill>
+            <a:srgbClr val="EDF7F4"/>
+          </a:solidFill>
+          <a:ln w="12700">
+            <a:solidFill>
+              <a:srgbClr val="2FE6C4"/>
+            </a:solidFill>
+            <a:prstDash val="solid"/>
+          </a:ln>
+        </p:spPr>
+        <p:txBody>
+          <a:bodyPr/>
+          <a:p/>
+        </p:txBody>
+      </p:sp>
+      <p:sp>
+        <p:nvSpPr>
+          <p:cNvPr id="9" name="Text 7"/>
+          <p:cNvSpPr txBox="1"/>
+          <p:nvPr/>
+        </p:nvSpPr>
+        <p:spPr>
+          <a:xfrm>
+            <a:off x="868680" y="3950208"/>
+            <a:ext cx="10454335" cy="832104"/>
+          </a:xfrm>
+          <a:prstGeom prst="rect">
+            <a:avLst/>
+          </a:prstGeom>
+          <a:noFill/>
+          <a:ln/>
+        </p:spPr>
+        <p:txBody>
+          <a:bodyPr wrap="square" lIns="0" tIns="0" rIns="0" bIns="0" rtlCol="0" anchor="t"/>
+          <a:lstStyle/>
+          <a:p>
+            <a:pPr indent="0" marL="0">
+              <a:lnSpc>
+                <a:spcPct val="115000"/>
+              </a:lnSpc>
+              <a:buNone/>
+            </a:pPr>
+            <a:r>
+              <a:rPr lang="en-US" sz="1800" dirty="0">
+                <a:solidFill>
+                  <a:srgbClr val="1F2429"/>
+                </a:solidFill>
+                <a:latin typeface="Calibri" pitchFamily="34" charset="0"/>
+                <a:ea typeface="Calibri" pitchFamily="34" charset="-122"/>
+                <a:cs typeface="Calibri" pitchFamily="34" charset="-120"/>
+              </a:rPr>
+              <a:t>An unrestricted formula (e.g. heavy use of ¬ over an unbounded domain) can describe an infinite result. Safety restricts formulas to values that actually appear in the database.</a:t>
+            </a:r>
+            <a:endParaRPr lang="en-US" sz="1200" dirty="0"/>
+          </a:p>
+        </p:txBody>
+      </p:sp>
+      <p:sp>
+        <p:nvSpPr>
+          <p:cNvPr id="10" name="Text 8"/>
+          <p:cNvSpPr/>
+          <p:nvPr/>
+        </p:nvSpPr>
+        <p:spPr>
+          <a:xfrm>
+            <a:off x="9951415" y="6455664"/>
+            <a:ext cx="2011680" cy="292608"/>
+          </a:xfrm>
+          <a:prstGeom prst="rect">
+            <a:avLst/>
+          </a:prstGeom>
+          <a:noFill/>
+          <a:ln/>
+        </p:spPr>
+        <p:txBody>
+          <a:bodyPr wrap="square" rtlCol="0" anchor="ctr"/>
+          <a:lstStyle/>
+          <a:p>
+            <a:pPr algn="r" indent="0" marL="0">
+              <a:buNone/>
+            </a:pPr>
+            <a:r>
+              <a:rPr lang="en-US" sz="1200" u="sng" dirty="0">
+                <a:solidFill>
+                  <a:srgbClr val="8A939B"/>
+                </a:solidFill>
+                <a:latin typeface="Calibri" pitchFamily="34" charset="0"/>
+                <a:ea typeface="Calibri" pitchFamily="34" charset="-122"/>
+                <a:cs typeface="Calibri" pitchFamily="34" charset="-120"/>
+                <a:hlinkClick r:id="rId1" invalidUrl="" action="" tgtFrame="" tooltip="" history="1" highlightClick="0" endSnd="0">
+                  <a:extLst>
+                    <a:ext uri="{A12FA001-AC4F-418D-AE19-62706E023703}">
+                      <ahyp:hlinkClr xmlns:ahyp="http://schemas.microsoft.com/office/drawing/2018/hyperlinkcolor" val="tx"/>
+                    </a:ext>
+                  </a:extLst>
+                </a:hlinkClick>
+              </a:rPr>
+              <a:t>cuinotes.com</a:t>
+            </a:r>
+            <a:pPr algn="r" indent="0" marL="0">
+              <a:buNone/>
+            </a:pPr>
+            <a:r>
+              <a:rPr lang="en-US" sz="1200" dirty="0">
+                <a:solidFill>
+                  <a:srgbClr val="8A939B"/>
+                </a:solidFill>
+                <a:latin typeface="Calibri" pitchFamily="34" charset="0"/>
+                <a:ea typeface="Calibri" pitchFamily="34" charset="-122"/>
+                <a:cs typeface="Calibri" pitchFamily="34" charset="-120"/>
+              </a:rPr>
+              <a:t>  ·  14</a:t>
+            </a:r>
+            <a:endParaRPr lang="en-US" sz="1000" dirty="0"/>
+          </a:p>
+        </p:txBody>
+      </p:sp>
+    </p:spTree>
+  </p:cSld>
+  <p:clrMapOvr>
+    <a:masterClrMapping/>
+  </p:clrMapOvr>
+</p:sld>
+</file>
+
+<file path=ppt/slides/slide15.xml><?xml version="1.0" encoding="utf-8"?>
 <p:sld xmlns:a="http://schemas.openxmlformats.org/drawingml/2006/main" xmlns:r="http://schemas.openxmlformats.org/officeDocument/2006/relationships" xmlns:p="http://schemas.openxmlformats.org/presentationml/2006/main">
   <p:cSld name="Slide 14">
     <p:bg>
@@ -4270,7 +4749,7 @@
                 <a:ea typeface="Calibri" pitchFamily="34" charset="-122"/>
                 <a:cs typeface="Calibri" pitchFamily="34" charset="-120"/>
               </a:rPr>
-              <a:t>SELF-TEST · 3 OF 3</a:t>
+              <a:t>SELF-TEST · 4 OF 4</a:t>
             </a:r>
             <a:endParaRPr lang="en-US" sz="1250" dirty="0"/>
           </a:p>
@@ -4360,7 +4839,7 @@
               <a:buNone/>
             </a:pPr>
             <a:r>
-              <a:rPr lang="en-US" sz="1300" dirty="0">
+              <a:rPr lang="en-US" sz="1800" dirty="0">
                 <a:solidFill>
                   <a:srgbClr val="1F2429"/>
                 </a:solidFill>
@@ -4383,7 +4862,7 @@
         <p:spPr>
           <a:xfrm>
             <a:off x="640080" y="2103120"/>
-            <a:ext cx="10911535" cy="1188720"/>
+            <a:ext cx="10911535" cy="1500000"/>
           </a:xfrm>
           <a:prstGeom prst="roundRect">
             <a:avLst>
@@ -4400,6 +4879,10 @@
             <a:prstDash val="solid"/>
           </a:ln>
         </p:spPr>
+        <p:txBody>
+          <a:bodyPr/>
+          <a:p/>
+        </p:txBody>
       </p:sp>
       <p:sp>
         <p:nvSpPr>
@@ -4410,7 +4893,7 @@
         <p:spPr>
           <a:xfrm>
             <a:off x="868680" y="2212848"/>
-            <a:ext cx="10454335" cy="969264"/>
+            <a:ext cx="10454335" cy="1300000"/>
           </a:xfrm>
           <a:prstGeom prst="rect">
             <a:avLst/>
@@ -4429,11 +4912,11 @@
               <a:buNone/>
             </a:pPr>
             <a:r>
-              <a:rPr lang="en-US" sz="1100" dirty="0">
+              <a:rPr lang="en-US" sz="1800" dirty="0">
                 <a:solidFill>
                   <a:srgbClr val="1F2429"/>
                 </a:solidFill>
-                <a:latin typeface="Courier New" pitchFamily="34" charset="0"/>
+                <a:latin typeface="Calibri" pitchFamily="34" charset="0"/>
                 <a:ea typeface="Courier New" pitchFamily="34" charset="-122"/>
                 <a:cs typeface="Courier New" pitchFamily="34" charset="-120"/>
               </a:rPr>
@@ -4449,11 +4932,11 @@
               <a:buNone/>
             </a:pPr>
             <a:r>
-              <a:rPr lang="en-US" sz="1100" dirty="0">
+              <a:rPr lang="en-US" sz="1800" dirty="0">
                 <a:solidFill>
                   <a:srgbClr val="1F2429"/>
                 </a:solidFill>
-                <a:latin typeface="Courier New" pitchFamily="34" charset="0"/>
+                <a:latin typeface="Calibri" pitchFamily="34" charset="0"/>
                 <a:ea typeface="Courier New" pitchFamily="34" charset="-122"/>
                 <a:cs typeface="Courier New" pitchFamily="34" charset="-120"/>
               </a:rPr>
@@ -4469,11 +4952,11 @@
               <a:buNone/>
             </a:pPr>
             <a:r>
-              <a:rPr lang="en-US" sz="1100" dirty="0">
+              <a:rPr lang="en-US" sz="1800" dirty="0">
                 <a:solidFill>
                   <a:srgbClr val="1F2429"/>
                 </a:solidFill>
-                <a:latin typeface="Courier New" pitchFamily="34" charset="0"/>
+                <a:latin typeface="Calibri" pitchFamily="34" charset="0"/>
                 <a:ea typeface="Courier New" pitchFamily="34" charset="-122"/>
                 <a:cs typeface="Courier New" pitchFamily="34" charset="-120"/>
               </a:rPr>
@@ -4491,7 +4974,7 @@
         </p:nvSpPr>
         <p:spPr>
           <a:xfrm>
-            <a:off x="640080" y="3566160"/>
+            <a:off x="640080" y="3750000"/>
             <a:ext cx="10911535" cy="548640"/>
           </a:xfrm>
           <a:prstGeom prst="rect">
@@ -4528,7 +5011,7 @@
               <a:buNone/>
             </a:pPr>
             <a:r>
-              <a:rPr lang="en-US" sz="1300" dirty="0">
+              <a:rPr lang="en-US" sz="1800" dirty="0">
                 <a:solidFill>
                   <a:srgbClr val="1F2429"/>
                 </a:solidFill>
@@ -4550,7 +5033,7 @@
         </p:nvSpPr>
         <p:spPr>
           <a:xfrm>
-            <a:off x="640080" y="4114800"/>
+            <a:off x="640080" y="4300000"/>
             <a:ext cx="10911535" cy="960120"/>
           </a:xfrm>
           <a:prstGeom prst="roundRect">
@@ -4568,6 +5051,10 @@
             <a:prstDash val="solid"/>
           </a:ln>
         </p:spPr>
+        <p:txBody>
+          <a:bodyPr/>
+          <a:p/>
+        </p:txBody>
       </p:sp>
       <p:sp>
         <p:nvSpPr>
@@ -4577,7 +5064,7 @@
         </p:nvSpPr>
         <p:spPr>
           <a:xfrm>
-            <a:off x="868680" y="4224528"/>
+            <a:off x="868680" y="4410000"/>
             <a:ext cx="10454335" cy="740664"/>
           </a:xfrm>
           <a:prstGeom prst="rect">
@@ -4597,7 +5084,7 @@
               <a:buNone/>
             </a:pPr>
             <a:r>
-              <a:rPr lang="en-US" sz="1200" dirty="0">
+              <a:rPr lang="en-US" sz="1800" dirty="0">
                 <a:solidFill>
                   <a:srgbClr val="1F2429"/>
                 </a:solidFill>
@@ -4636,7 +5123,7 @@
               <a:buNone/>
             </a:pPr>
             <a:r>
-              <a:rPr lang="en-US" sz="1000" u="sng" dirty="0">
+              <a:rPr lang="en-US" sz="1200" u="sng" dirty="0">
                 <a:solidFill>
                   <a:srgbClr val="8A939B"/>
                 </a:solidFill>
@@ -4657,7 +5144,7 @@
               <a:buNone/>
             </a:pPr>
             <a:r>
-              <a:rPr lang="en-US" sz="1000" dirty="0">
+              <a:rPr lang="en-US" sz="1200" dirty="0">
                 <a:solidFill>
                   <a:srgbClr val="8A939B"/>
                 </a:solidFill>
@@ -4665,7 +5152,7 @@
                 <a:ea typeface="Calibri" pitchFamily="34" charset="-122"/>
                 <a:cs typeface="Calibri" pitchFamily="34" charset="-120"/>
               </a:rPr>
-              <a:t>  ·  14</a:t>
+              <a:t>  ·  15</a:t>
             </a:r>
             <a:endParaRPr lang="en-US" sz="1000" dirty="0"/>
           </a:p>
@@ -4679,7 +5166,7 @@
 </p:sld>
 </file>
 
-<file path=ppt/slides/slide15.xml><?xml version="1.0" encoding="utf-8"?>
+<file path=ppt/slides/slide16.xml><?xml version="1.0" encoding="utf-8"?>
 <p:sld xmlns:a="http://schemas.openxmlformats.org/drawingml/2006/main" xmlns:r="http://schemas.openxmlformats.org/officeDocument/2006/relationships" xmlns:p="http://schemas.openxmlformats.org/presentationml/2006/main">
   <p:cSld name="Slide 15">
     <p:bg>
@@ -4800,6 +5287,10 @@
           </a:solidFill>
           <a:ln/>
         </p:spPr>
+        <p:txBody>
+          <a:bodyPr/>
+          <a:p/>
+        </p:txBody>
       </p:sp>
       <p:sp>
         <p:nvSpPr>
@@ -4868,7 +5359,7 @@
               <a:buNone/>
             </a:pPr>
             <a:r>
-              <a:rPr lang="en-US" sz="1350" dirty="0">
+              <a:rPr lang="en-US" sz="1800" dirty="0">
                 <a:solidFill>
                   <a:srgbClr val="E4E7EA"/>
                 </a:solidFill>
@@ -4901,6 +5392,10 @@
           </a:solidFill>
           <a:ln/>
         </p:spPr>
+        <p:txBody>
+          <a:bodyPr/>
+          <a:p/>
+        </p:txBody>
       </p:sp>
       <p:sp>
         <p:nvSpPr>
@@ -4969,7 +5464,7 @@
               <a:buNone/>
             </a:pPr>
             <a:r>
-              <a:rPr lang="en-US" sz="1350" dirty="0">
+              <a:rPr lang="en-US" sz="1800" dirty="0">
                 <a:solidFill>
                   <a:srgbClr val="E4E7EA"/>
                 </a:solidFill>
@@ -5002,6 +5497,10 @@
           </a:solidFill>
           <a:ln/>
         </p:spPr>
+        <p:txBody>
+          <a:bodyPr/>
+          <a:p/>
+        </p:txBody>
       </p:sp>
       <p:sp>
         <p:nvSpPr>
@@ -5070,7 +5569,7 @@
               <a:buNone/>
             </a:pPr>
             <a:r>
-              <a:rPr lang="en-US" sz="1350" dirty="0">
+              <a:rPr lang="en-US" sz="1800" dirty="0">
                 <a:solidFill>
                   <a:srgbClr val="E4E7EA"/>
                 </a:solidFill>
@@ -5103,6 +5602,10 @@
           </a:solidFill>
           <a:ln/>
         </p:spPr>
+        <p:txBody>
+          <a:bodyPr/>
+          <a:p/>
+        </p:txBody>
       </p:sp>
       <p:sp>
         <p:nvSpPr>
@@ -5171,7 +5674,7 @@
               <a:buNone/>
             </a:pPr>
             <a:r>
-              <a:rPr lang="en-US" sz="1350" dirty="0">
+              <a:rPr lang="en-US" sz="1800" dirty="0">
                 <a:solidFill>
                   <a:srgbClr val="E4E7EA"/>
                 </a:solidFill>
@@ -5204,6 +5707,10 @@
           </a:solidFill>
           <a:ln/>
         </p:spPr>
+        <p:txBody>
+          <a:bodyPr/>
+          <a:p/>
+        </p:txBody>
       </p:sp>
       <p:sp>
         <p:nvSpPr>
@@ -5272,7 +5779,7 @@
               <a:buNone/>
             </a:pPr>
             <a:r>
-              <a:rPr lang="en-US" sz="1350" dirty="0">
+              <a:rPr lang="en-US" sz="1800" dirty="0">
                 <a:solidFill>
                   <a:srgbClr val="E4E7EA"/>
                 </a:solidFill>
@@ -5305,6 +5812,10 @@
           </a:solidFill>
           <a:ln/>
         </p:spPr>
+        <p:txBody>
+          <a:bodyPr/>
+          <a:p/>
+        </p:txBody>
       </p:sp>
       <p:sp>
         <p:nvSpPr>
@@ -5373,7 +5884,7 @@
               <a:buNone/>
             </a:pPr>
             <a:r>
-              <a:rPr lang="en-US" sz="1350" dirty="0">
+              <a:rPr lang="en-US" sz="1800" dirty="0">
                 <a:solidFill>
                   <a:srgbClr val="E4E7EA"/>
                 </a:solidFill>
@@ -5412,7 +5923,7 @@
               <a:buNone/>
             </a:pPr>
             <a:r>
-              <a:rPr lang="en-US" sz="1000" u="sng" dirty="0">
+              <a:rPr lang="en-US" sz="1200" u="sng" dirty="0">
                 <a:solidFill>
                   <a:srgbClr val="8A939B"/>
                 </a:solidFill>
@@ -5433,7 +5944,7 @@
               <a:buNone/>
             </a:pPr>
             <a:r>
-              <a:rPr lang="en-US" sz="1000" dirty="0">
+              <a:rPr lang="en-US" sz="1200" dirty="0">
                 <a:solidFill>
                   <a:srgbClr val="8A939B"/>
                 </a:solidFill>
@@ -5441,7 +5952,7 @@
                 <a:ea typeface="Calibri" pitchFamily="34" charset="-122"/>
                 <a:cs typeface="Calibri" pitchFamily="34" charset="-120"/>
               </a:rPr>
-              <a:t>  ·  15</a:t>
+              <a:t>  ·  16</a:t>
             </a:r>
             <a:endParaRPr lang="en-US" sz="1000" dirty="0"/>
           </a:p>
@@ -5576,6 +6087,10 @@
           </a:solidFill>
           <a:ln/>
         </p:spPr>
+        <p:txBody>
+          <a:bodyPr/>
+          <a:p/>
+        </p:txBody>
       </p:sp>
       <p:sp>
         <p:nvSpPr>
@@ -5641,7 +6156,7 @@
               <a:buNone/>
             </a:pPr>
             <a:r>
-              <a:rPr lang="en-US" sz="1500" dirty="0">
+              <a:rPr lang="en-US" sz="1800" dirty="0">
                 <a:solidFill>
                   <a:srgbClr val="1F2429"/>
                 </a:solidFill>
@@ -5674,6 +6189,10 @@
           </a:solidFill>
           <a:ln/>
         </p:spPr>
+        <p:txBody>
+          <a:bodyPr/>
+          <a:p/>
+        </p:txBody>
       </p:sp>
       <p:sp>
         <p:nvSpPr>
@@ -5739,7 +6258,7 @@
               <a:buNone/>
             </a:pPr>
             <a:r>
-              <a:rPr lang="en-US" sz="1500" dirty="0">
+              <a:rPr lang="en-US" sz="1800" dirty="0">
                 <a:solidFill>
                   <a:srgbClr val="1F2429"/>
                 </a:solidFill>
@@ -5772,6 +6291,10 @@
           </a:solidFill>
           <a:ln/>
         </p:spPr>
+        <p:txBody>
+          <a:bodyPr/>
+          <a:p/>
+        </p:txBody>
       </p:sp>
       <p:sp>
         <p:nvSpPr>
@@ -5837,7 +6360,7 @@
               <a:buNone/>
             </a:pPr>
             <a:r>
-              <a:rPr lang="en-US" sz="1500" dirty="0">
+              <a:rPr lang="en-US" sz="1800" dirty="0">
                 <a:solidFill>
                   <a:srgbClr val="1F2429"/>
                 </a:solidFill>
@@ -5870,6 +6393,10 @@
           </a:solidFill>
           <a:ln/>
         </p:spPr>
+        <p:txBody>
+          <a:bodyPr/>
+          <a:p/>
+        </p:txBody>
       </p:sp>
       <p:sp>
         <p:nvSpPr>
@@ -5935,7 +6462,7 @@
               <a:buNone/>
             </a:pPr>
             <a:r>
-              <a:rPr lang="en-US" sz="1500" dirty="0">
+              <a:rPr lang="en-US" sz="1800" dirty="0">
                 <a:solidFill>
                   <a:srgbClr val="1F2429"/>
                 </a:solidFill>
@@ -5968,6 +6495,10 @@
           </a:solidFill>
           <a:ln/>
         </p:spPr>
+        <p:txBody>
+          <a:bodyPr/>
+          <a:p/>
+        </p:txBody>
       </p:sp>
       <p:sp>
         <p:nvSpPr>
@@ -6033,7 +6564,7 @@
               <a:buNone/>
             </a:pPr>
             <a:r>
-              <a:rPr lang="en-US" sz="1500" dirty="0">
+              <a:rPr lang="en-US" sz="1800" dirty="0">
                 <a:solidFill>
                   <a:srgbClr val="1F2429"/>
                 </a:solidFill>
@@ -6072,7 +6603,7 @@
               <a:buNone/>
             </a:pPr>
             <a:r>
-              <a:rPr lang="en-US" sz="1000" u="sng" dirty="0">
+              <a:rPr lang="en-US" sz="1200" u="sng" dirty="0">
                 <a:solidFill>
                   <a:srgbClr val="8A939B"/>
                 </a:solidFill>
@@ -6093,7 +6624,7 @@
               <a:buNone/>
             </a:pPr>
             <a:r>
-              <a:rPr lang="en-US" sz="1000" dirty="0">
+              <a:rPr lang="en-US" sz="1200" dirty="0">
                 <a:solidFill>
                   <a:srgbClr val="8A939B"/>
                 </a:solidFill>
@@ -6242,7 +6773,7 @@
               <a:buNone/>
             </a:pPr>
             <a:r>
-              <a:rPr lang="en-US" sz="1350" dirty="0">
+              <a:rPr lang="en-US" sz="1800" dirty="0">
                 <a:solidFill>
                   <a:srgbClr val="1F2429"/>
                 </a:solidFill>
@@ -6277,6 +6808,10 @@
           </a:solidFill>
           <a:ln/>
         </p:spPr>
+        <p:txBody>
+          <a:bodyPr/>
+          <a:p/>
+        </p:txBody>
       </p:sp>
       <p:sp>
         <p:nvSpPr>
@@ -6303,7 +6838,7 @@
               <a:buNone/>
             </a:pPr>
             <a:r>
-              <a:rPr lang="en-US" sz="1400" b="1" dirty="0">
+              <a:rPr lang="en-US" sz="1800" b="1" dirty="0">
                 <a:solidFill>
                   <a:srgbClr val="14181C"/>
                 </a:solidFill>
@@ -6342,7 +6877,7 @@
               <a:buNone/>
             </a:pPr>
             <a:r>
-              <a:rPr lang="en-US" sz="1150" dirty="0">
+              <a:rPr lang="en-US" sz="1800" dirty="0">
                 <a:solidFill>
                   <a:srgbClr val="20242A"/>
                 </a:solidFill>
@@ -6379,6 +6914,10 @@
             <a:tailEnd type="triangle"/>
           </a:ln>
         </p:spPr>
+        <p:txBody>
+          <a:bodyPr/>
+          <a:p/>
+        </p:txBody>
       </p:sp>
       <p:sp>
         <p:nvSpPr>
@@ -6401,6 +6940,10 @@
           </a:solidFill>
           <a:ln/>
         </p:spPr>
+        <p:txBody>
+          <a:bodyPr/>
+          <a:p/>
+        </p:txBody>
       </p:sp>
       <p:sp>
         <p:nvSpPr>
@@ -6427,7 +6970,7 @@
               <a:buNone/>
             </a:pPr>
             <a:r>
-              <a:rPr lang="en-US" sz="1400" b="1" dirty="0">
+              <a:rPr lang="en-US" sz="1800" b="1" dirty="0">
                 <a:solidFill>
                   <a:srgbClr val="14181C"/>
                 </a:solidFill>
@@ -6466,7 +7009,7 @@
               <a:buNone/>
             </a:pPr>
             <a:r>
-              <a:rPr lang="en-US" sz="1150" dirty="0">
+              <a:rPr lang="en-US" sz="1800" dirty="0">
                 <a:solidFill>
                   <a:srgbClr val="20242A"/>
                 </a:solidFill>
@@ -6503,6 +7046,10 @@
             <a:tailEnd type="triangle"/>
           </a:ln>
         </p:spPr>
+        <p:txBody>
+          <a:bodyPr/>
+          <a:p/>
+        </p:txBody>
       </p:sp>
       <p:sp>
         <p:nvSpPr>
@@ -6525,6 +7072,10 @@
           </a:solidFill>
           <a:ln/>
         </p:spPr>
+        <p:txBody>
+          <a:bodyPr/>
+          <a:p/>
+        </p:txBody>
       </p:sp>
       <p:sp>
         <p:nvSpPr>
@@ -6551,7 +7102,7 @@
               <a:buNone/>
             </a:pPr>
             <a:r>
-              <a:rPr lang="en-US" sz="1400" b="1" dirty="0">
+              <a:rPr lang="en-US" sz="1800" b="1" dirty="0">
                 <a:solidFill>
                   <a:srgbClr val="14181C"/>
                 </a:solidFill>
@@ -6590,7 +7141,7 @@
               <a:buNone/>
             </a:pPr>
             <a:r>
-              <a:rPr lang="en-US" sz="1150" dirty="0">
+              <a:rPr lang="en-US" sz="1800" dirty="0">
                 <a:solidFill>
                   <a:srgbClr val="20242A"/>
                 </a:solidFill>
@@ -6627,6 +7178,10 @@
             <a:tailEnd type="triangle"/>
           </a:ln>
         </p:spPr>
+        <p:txBody>
+          <a:bodyPr/>
+          <a:p/>
+        </p:txBody>
       </p:sp>
       <p:sp>
         <p:nvSpPr>
@@ -6649,6 +7204,10 @@
           </a:solidFill>
           <a:ln/>
         </p:spPr>
+        <p:txBody>
+          <a:bodyPr/>
+          <a:p/>
+        </p:txBody>
       </p:sp>
       <p:sp>
         <p:nvSpPr>
@@ -6675,7 +7234,7 @@
               <a:buNone/>
             </a:pPr>
             <a:r>
-              <a:rPr lang="en-US" sz="1400" b="1" dirty="0">
+              <a:rPr lang="en-US" sz="1800" b="1" dirty="0">
                 <a:solidFill>
                   <a:srgbClr val="14181C"/>
                 </a:solidFill>
@@ -6714,7 +7273,7 @@
               <a:buNone/>
             </a:pPr>
             <a:r>
-              <a:rPr lang="en-US" sz="1150" dirty="0">
+              <a:rPr lang="en-US" sz="1800" dirty="0">
                 <a:solidFill>
                   <a:srgbClr val="20242A"/>
                 </a:solidFill>
@@ -6753,7 +7312,7 @@
               <a:buNone/>
             </a:pPr>
             <a:r>
-              <a:rPr lang="en-US" sz="1000" u="sng" dirty="0">
+              <a:rPr lang="en-US" sz="1200" u="sng" dirty="0">
                 <a:solidFill>
                   <a:srgbClr val="8A939B"/>
                 </a:solidFill>
@@ -6774,7 +7333,7 @@
               <a:buNone/>
             </a:pPr>
             <a:r>
-              <a:rPr lang="en-US" sz="1000" dirty="0">
+              <a:rPr lang="en-US" sz="1200" dirty="0">
                 <a:solidFill>
                   <a:srgbClr val="8A939B"/>
                 </a:solidFill>
@@ -6930,7 +7489,7 @@
               <a:buChar char="•"/>
             </a:pPr>
             <a:r>
-              <a:rPr lang="en-US" sz="1350" dirty="0">
+              <a:rPr lang="en-US" sz="1800" dirty="0">
                 <a:solidFill>
                   <a:srgbClr val="1F2429"/>
                 </a:solidFill>
@@ -6954,7 +7513,7 @@
               <a:buChar char="•"/>
             </a:pPr>
             <a:r>
-              <a:rPr lang="en-US" sz="1350" dirty="0">
+              <a:rPr lang="en-US" sz="1800" dirty="0">
                 <a:solidFill>
                   <a:srgbClr val="1F2429"/>
                 </a:solidFill>
@@ -6978,7 +7537,7 @@
               <a:buChar char="•"/>
             </a:pPr>
             <a:r>
-              <a:rPr lang="en-US" sz="1350" dirty="0">
+              <a:rPr lang="en-US" sz="1800" dirty="0">
                 <a:solidFill>
                   <a:srgbClr val="1F2429"/>
                 </a:solidFill>
@@ -7013,6 +7572,10 @@
           </a:solidFill>
           <a:ln/>
         </p:spPr>
+        <p:txBody>
+          <a:bodyPr/>
+          <a:p/>
+        </p:txBody>
       </p:sp>
       <p:sp>
         <p:nvSpPr>
@@ -7042,7 +7605,7 @@
               <a:buNone/>
             </a:pPr>
             <a:r>
-              <a:rPr lang="en-US" sz="1300" b="1" dirty="0">
+              <a:rPr lang="en-US" sz="1800" b="1" dirty="0">
                 <a:solidFill>
                   <a:srgbClr val="14181C"/>
                 </a:solidFill>
@@ -7084,7 +7647,7 @@
               <a:buNone/>
             </a:pPr>
             <a:r>
-              <a:rPr lang="en-US" sz="1050" dirty="0">
+              <a:rPr lang="en-US" sz="1800" dirty="0">
                 <a:solidFill>
                   <a:srgbClr val="20242A"/>
                 </a:solidFill>
@@ -7121,6 +7684,10 @@
             <a:tailEnd type="triangle"/>
           </a:ln>
         </p:spPr>
+        <p:txBody>
+          <a:bodyPr/>
+          <a:p/>
+        </p:txBody>
       </p:sp>
       <p:sp>
         <p:nvSpPr>
@@ -7143,6 +7710,10 @@
           </a:solidFill>
           <a:ln/>
         </p:spPr>
+        <p:txBody>
+          <a:bodyPr/>
+          <a:p/>
+        </p:txBody>
       </p:sp>
       <p:sp>
         <p:nvSpPr>
@@ -7172,7 +7743,7 @@
               <a:buNone/>
             </a:pPr>
             <a:r>
-              <a:rPr lang="en-US" sz="1300" b="1" dirty="0">
+              <a:rPr lang="en-US" sz="1800" b="1" dirty="0">
                 <a:solidFill>
                   <a:srgbClr val="14181C"/>
                 </a:solidFill>
@@ -7214,7 +7785,7 @@
               <a:buNone/>
             </a:pPr>
             <a:r>
-              <a:rPr lang="en-US" sz="1050" dirty="0">
+              <a:rPr lang="en-US" sz="1800" dirty="0">
                 <a:solidFill>
                   <a:srgbClr val="20242A"/>
                 </a:solidFill>
@@ -7251,6 +7822,10 @@
             <a:tailEnd type="triangle"/>
           </a:ln>
         </p:spPr>
+        <p:txBody>
+          <a:bodyPr/>
+          <a:p/>
+        </p:txBody>
       </p:sp>
       <p:sp>
         <p:nvSpPr>
@@ -7273,6 +7848,10 @@
           </a:solidFill>
           <a:ln/>
         </p:spPr>
+        <p:txBody>
+          <a:bodyPr/>
+          <a:p/>
+        </p:txBody>
       </p:sp>
       <p:sp>
         <p:nvSpPr>
@@ -7302,7 +7881,7 @@
               <a:buNone/>
             </a:pPr>
             <a:r>
-              <a:rPr lang="en-US" sz="1300" b="1" dirty="0">
+              <a:rPr lang="en-US" sz="1800" b="1" dirty="0">
                 <a:solidFill>
                   <a:srgbClr val="14181C"/>
                 </a:solidFill>
@@ -7344,7 +7923,7 @@
               <a:buNone/>
             </a:pPr>
             <a:r>
-              <a:rPr lang="en-US" sz="1050" dirty="0">
+              <a:rPr lang="en-US" sz="1800" dirty="0">
                 <a:solidFill>
                   <a:srgbClr val="20242A"/>
                 </a:solidFill>
@@ -7383,7 +7962,7 @@
               <a:buNone/>
             </a:pPr>
             <a:r>
-              <a:rPr lang="en-US" sz="1250" b="1" dirty="0">
+              <a:rPr lang="en-US" sz="1800" b="1" dirty="0">
                 <a:solidFill>
                   <a:srgbClr val="2FE6C4"/>
                 </a:solidFill>
@@ -7397,7 +7976,7 @@
               <a:buNone/>
             </a:pPr>
             <a:r>
-              <a:rPr lang="en-US" sz="1250" dirty="0">
+              <a:rPr lang="en-US" sz="1800" dirty="0">
                 <a:solidFill>
                   <a:srgbClr val="1F2429"/>
                 </a:solidFill>
@@ -7411,7 +7990,7 @@
               <a:buNone/>
             </a:pPr>
             <a:r>
-              <a:rPr lang="en-US" sz="1250" b="1" dirty="0">
+              <a:rPr lang="en-US" sz="1800" b="1" dirty="0">
                 <a:solidFill>
                   <a:srgbClr val="E8A33D"/>
                 </a:solidFill>
@@ -7425,7 +8004,7 @@
               <a:buNone/>
             </a:pPr>
             <a:r>
-              <a:rPr lang="en-US" sz="1250" dirty="0">
+              <a:rPr lang="en-US" sz="1800" dirty="0">
                 <a:solidFill>
                   <a:srgbClr val="1F2429"/>
                 </a:solidFill>
@@ -7464,7 +8043,7 @@
               <a:buNone/>
             </a:pPr>
             <a:r>
-              <a:rPr lang="en-US" sz="1000" u="sng" dirty="0">
+              <a:rPr lang="en-US" sz="1200" u="sng" dirty="0">
                 <a:solidFill>
                   <a:srgbClr val="8A939B"/>
                 </a:solidFill>
@@ -7485,7 +8064,7 @@
               <a:buNone/>
             </a:pPr>
             <a:r>
-              <a:rPr lang="en-US" sz="1000" dirty="0">
+              <a:rPr lang="en-US" sz="1200" dirty="0">
                 <a:solidFill>
                   <a:srgbClr val="8A939B"/>
                 </a:solidFill>
@@ -7634,7 +8213,7 @@
               <a:buNone/>
             </a:pPr>
             <a:r>
-              <a:rPr lang="en-US" sz="1300" dirty="0">
+              <a:rPr lang="en-US" sz="1800" dirty="0">
                 <a:solidFill>
                   <a:srgbClr val="1F2429"/>
                 </a:solidFill>
@@ -7650,7 +8229,7 @@
       </p:sp>
       <p:graphicFrame>
         <p:nvGraphicFramePr>
-          <p:cNvPr id="6" name="Table 0"/>
+          <p:cNvPr id="5" name="Table 0"/>
           <p:cNvGraphicFramePr>
             <a:graphicFrameLocks noGrp="1"/>
           </p:cNvGraphicFramePr>
@@ -7684,7 +8263,7 @@
                         <a:buNone/>
                       </a:pPr>
                       <a:r>
-                        <a:rPr lang="en-US" sz="1200" b="1" dirty="0">
+                        <a:rPr lang="en-US" sz="1400" b="1" dirty="0">
                           <a:solidFill>
                             <a:srgbClr val="FFFFFF"/>
                           </a:solidFill>
@@ -7752,7 +8331,7 @@
                         <a:buNone/>
                       </a:pPr>
                       <a:r>
-                        <a:rPr lang="en-US" sz="1200" b="1" dirty="0">
+                        <a:rPr lang="en-US" sz="1400" b="1" dirty="0">
                           <a:solidFill>
                             <a:srgbClr val="FFFFFF"/>
                           </a:solidFill>
@@ -7822,7 +8401,7 @@
                         <a:buNone/>
                       </a:pPr>
                       <a:r>
-                        <a:rPr lang="en-US" sz="1200" dirty="0">
+                        <a:rPr lang="en-US" sz="1400" dirty="0">
                           <a:solidFill>
                             <a:srgbClr val="1F2429"/>
                           </a:solidFill>
@@ -7890,7 +8469,7 @@
                         <a:buNone/>
                       </a:pPr>
                       <a:r>
-                        <a:rPr lang="en-US" sz="1200" dirty="0">
+                        <a:rPr lang="en-US" sz="1400" dirty="0">
                           <a:solidFill>
                             <a:srgbClr val="1F2429"/>
                           </a:solidFill>
@@ -7960,7 +8539,7 @@
                         <a:buNone/>
                       </a:pPr>
                       <a:r>
-                        <a:rPr lang="en-US" sz="1200" dirty="0">
+                        <a:rPr lang="en-US" sz="1400" dirty="0">
                           <a:solidFill>
                             <a:srgbClr val="1F2429"/>
                           </a:solidFill>
@@ -8028,7 +8607,7 @@
                         <a:buNone/>
                       </a:pPr>
                       <a:r>
-                        <a:rPr lang="en-US" sz="1200" dirty="0">
+                        <a:rPr lang="en-US" sz="1400" dirty="0">
                           <a:solidFill>
                             <a:srgbClr val="1F2429"/>
                           </a:solidFill>
@@ -8098,7 +8677,7 @@
                         <a:buNone/>
                       </a:pPr>
                       <a:r>
-                        <a:rPr lang="en-US" sz="1200" dirty="0">
+                        <a:rPr lang="en-US" sz="1400" dirty="0">
                           <a:solidFill>
                             <a:srgbClr val="1F2429"/>
                           </a:solidFill>
@@ -8166,7 +8745,7 @@
                         <a:buNone/>
                       </a:pPr>
                       <a:r>
-                        <a:rPr lang="en-US" sz="1200" dirty="0">
+                        <a:rPr lang="en-US" sz="1400" dirty="0">
                           <a:solidFill>
                             <a:srgbClr val="1F2429"/>
                           </a:solidFill>
@@ -8236,7 +8815,7 @@
                         <a:buNone/>
                       </a:pPr>
                       <a:r>
-                        <a:rPr lang="en-US" sz="1200" dirty="0">
+                        <a:rPr lang="en-US" sz="1400" dirty="0">
                           <a:solidFill>
                             <a:srgbClr val="1F2429"/>
                           </a:solidFill>
@@ -8304,7 +8883,7 @@
                         <a:buNone/>
                       </a:pPr>
                       <a:r>
-                        <a:rPr lang="en-US" sz="1200" dirty="0">
+                        <a:rPr lang="en-US" sz="1400" dirty="0">
                           <a:solidFill>
                             <a:srgbClr val="1F2429"/>
                           </a:solidFill>
@@ -8374,7 +8953,7 @@
                         <a:buNone/>
                       </a:pPr>
                       <a:r>
-                        <a:rPr lang="en-US" sz="1200" dirty="0">
+                        <a:rPr lang="en-US" sz="1400" dirty="0">
                           <a:solidFill>
                             <a:srgbClr val="1F2429"/>
                           </a:solidFill>
@@ -8442,7 +9021,7 @@
                         <a:buNone/>
                       </a:pPr>
                       <a:r>
-                        <a:rPr lang="en-US" sz="1200" dirty="0">
+                        <a:rPr lang="en-US" sz="1400" dirty="0">
                           <a:solidFill>
                             <a:srgbClr val="1F2429"/>
                           </a:solidFill>
@@ -8539,6 +9118,10 @@
             </a:outerShdw>
           </a:effectLst>
         </p:spPr>
+        <p:txBody>
+          <a:bodyPr/>
+          <a:p/>
+        </p:txBody>
       </p:sp>
       <p:sp>
         <p:nvSpPr>
@@ -8568,7 +9151,7 @@
               <a:buNone/>
             </a:pPr>
             <a:r>
-              <a:rPr lang="en-US" sz="1250" b="1" dirty="0">
+              <a:rPr lang="en-US" sz="1800" b="1" dirty="0">
                 <a:solidFill>
                   <a:srgbClr val="1F2429"/>
                 </a:solidFill>
@@ -8585,7 +9168,7 @@
               <a:buNone/>
             </a:pPr>
             <a:r>
-              <a:rPr lang="en-US" sz="1250" dirty="0">
+              <a:rPr lang="en-US" sz="1800" dirty="0">
                 <a:solidFill>
                   <a:srgbClr val="1F2429"/>
                 </a:solidFill>
@@ -8624,7 +9207,7 @@
               <a:buNone/>
             </a:pPr>
             <a:r>
-              <a:rPr lang="en-US" sz="1000" u="sng" dirty="0">
+              <a:rPr lang="en-US" sz="1200" u="sng" dirty="0">
                 <a:solidFill>
                   <a:srgbClr val="8A939B"/>
                 </a:solidFill>
@@ -8645,7 +9228,7 @@
               <a:buNone/>
             </a:pPr>
             <a:r>
-              <a:rPr lang="en-US" sz="1000" dirty="0">
+              <a:rPr lang="en-US" sz="1200" dirty="0">
                 <a:solidFill>
                   <a:srgbClr val="8A939B"/>
                 </a:solidFill>
@@ -8778,7 +9361,7 @@
         <p:spPr>
           <a:xfrm>
             <a:off x="640080" y="1417320"/>
-            <a:ext cx="10911535" cy="365760"/>
+            <a:ext cx="10911535" cy="700000"/>
           </a:xfrm>
           <a:prstGeom prst="rect">
             <a:avLst/>
@@ -8794,7 +9377,7 @@
               <a:buNone/>
             </a:pPr>
             <a:r>
-              <a:rPr lang="en-US" sz="1300" dirty="0">
+              <a:rPr lang="en-US" sz="1800" dirty="0">
                 <a:solidFill>
                   <a:srgbClr val="1F2429"/>
                 </a:solidFill>
@@ -8808,7 +9391,7 @@
               <a:buNone/>
             </a:pPr>
             <a:r>
-              <a:rPr lang="en-US" sz="1300" b="1" dirty="0">
+              <a:rPr lang="en-US" sz="1800" b="1" dirty="0">
                 <a:solidFill>
                   <a:srgbClr val="8B7FD9"/>
                 </a:solidFill>
@@ -8822,7 +9405,7 @@
               <a:buNone/>
             </a:pPr>
             <a:r>
-              <a:rPr lang="en-US" sz="1300" dirty="0">
+              <a:rPr lang="en-US" sz="1800" dirty="0">
                 <a:solidFill>
                   <a:srgbClr val="1F2429"/>
                 </a:solidFill>
@@ -8844,8 +9427,8 @@
         </p:nvSpPr>
         <p:spPr>
           <a:xfrm>
-            <a:off x="640080" y="1828800"/>
-            <a:ext cx="10911535" cy="594360"/>
+            <a:off x="640080" y="2250000"/>
+            <a:ext cx="10911535" cy="700000"/>
           </a:xfrm>
           <a:prstGeom prst="roundRect">
             <a:avLst>
@@ -8857,6 +9440,10 @@
           </a:solidFill>
           <a:ln/>
         </p:spPr>
+        <p:txBody>
+          <a:bodyPr/>
+          <a:p/>
+        </p:txBody>
       </p:sp>
       <p:sp>
         <p:nvSpPr>
@@ -8866,7 +9453,7 @@
         </p:nvSpPr>
         <p:spPr>
           <a:xfrm>
-            <a:off x="914400" y="2011680"/>
+            <a:off x="914400" y="2400000"/>
             <a:ext cx="10362895" cy="228600"/>
           </a:xfrm>
           <a:prstGeom prst="rect">
@@ -8886,11 +9473,11 @@
               <a:buNone/>
             </a:pPr>
             <a:r>
-              <a:rPr lang="en-US" sz="1500" dirty="0">
+              <a:rPr lang="en-US" sz="1800" dirty="0">
                 <a:solidFill>
                   <a:srgbClr val="2FE6C4"/>
                 </a:solidFill>
-                <a:latin typeface="Courier New" pitchFamily="34" charset="0"/>
+                <a:latin typeface="Calibri" pitchFamily="34" charset="0"/>
                 <a:ea typeface="Courier New" pitchFamily="34" charset="-122"/>
                 <a:cs typeface="Courier New" pitchFamily="34" charset="-120"/>
               </a:rPr>
@@ -8915,8 +9502,8 @@
           </p:nvPr>
         </p:nvGraphicFramePr>
         <p:xfrm>
-          <a:off x="640080" y="2697480"/>
-          <a:ext cx="10911535" cy="914400"/>
+          <a:off x="640080" y="3150000"/>
+          <a:ext cx="10911535" cy="1650000"/>
         </p:xfrm>
         <a:graphic>
           <a:graphicData uri="http://schemas.openxmlformats.org/drawingml/2006/table">
@@ -8927,7 +9514,7 @@
                 <a:gridCol w="7434072"/>
                 <a:gridCol w="1280160"/>
               </a:tblGrid>
-              <a:tr h="502920">
+              <a:tr h="330000">
                 <a:tc>
                   <a:txBody>
                     <a:bodyPr/>
@@ -8937,7 +9524,7 @@
                         <a:buNone/>
                       </a:pPr>
                       <a:r>
-                        <a:rPr lang="en-US" sz="1200" b="1" dirty="0">
+                        <a:rPr lang="en-US" sz="1400" b="1" dirty="0">
                           <a:solidFill>
                             <a:srgbClr val="FFFFFF"/>
                           </a:solidFill>
@@ -9005,7 +9592,7 @@
                         <a:buNone/>
                       </a:pPr>
                       <a:r>
-                        <a:rPr lang="en-US" sz="1200" b="1" dirty="0">
+                        <a:rPr lang="en-US" sz="1400" b="1" dirty="0">
                           <a:solidFill>
                             <a:srgbClr val="FFFFFF"/>
                           </a:solidFill>
@@ -9073,7 +9660,7 @@
                         <a:buNone/>
                       </a:pPr>
                       <a:r>
-                        <a:rPr lang="en-US" sz="1200" b="1" dirty="0">
+                        <a:rPr lang="en-US" sz="1400" b="1" dirty="0">
                           <a:solidFill>
                             <a:srgbClr val="FFFFFF"/>
                           </a:solidFill>
@@ -9133,7 +9720,7 @@
                   </a:tcPr>
                 </a:tc>
               </a:tr>
-              <a:tr h="502920">
+              <a:tr h="330000">
                 <a:tc>
                   <a:txBody>
                     <a:bodyPr/>
@@ -9143,7 +9730,7 @@
                         <a:buNone/>
                       </a:pPr>
                       <a:r>
-                        <a:rPr lang="en-US" sz="1200" dirty="0">
+                        <a:rPr lang="en-US" sz="1400" dirty="0">
                           <a:solidFill>
                             <a:srgbClr val="1F2429"/>
                           </a:solidFill>
@@ -9211,7 +9798,7 @@
                         <a:buNone/>
                       </a:pPr>
                       <a:r>
-                        <a:rPr lang="en-US" sz="1200" dirty="0">
+                        <a:rPr lang="en-US" sz="1400" dirty="0">
                           <a:solidFill>
                             <a:srgbClr val="1F2429"/>
                           </a:solidFill>
@@ -9279,7 +9866,7 @@
                         <a:buNone/>
                       </a:pPr>
                       <a:r>
-                        <a:rPr lang="en-US" sz="1200" dirty="0">
+                        <a:rPr lang="en-US" sz="1400" dirty="0">
                           <a:solidFill>
                             <a:srgbClr val="1F2429"/>
                           </a:solidFill>
@@ -9339,7 +9926,7 @@
                   </a:tcPr>
                 </a:tc>
               </a:tr>
-              <a:tr h="502920">
+              <a:tr h="330000">
                 <a:tc>
                   <a:txBody>
                     <a:bodyPr/>
@@ -9349,7 +9936,7 @@
                         <a:buNone/>
                       </a:pPr>
                       <a:r>
-                        <a:rPr lang="en-US" sz="1200" dirty="0">
+                        <a:rPr lang="en-US" sz="1400" dirty="0">
                           <a:solidFill>
                             <a:srgbClr val="1F2429"/>
                           </a:solidFill>
@@ -9417,7 +10004,7 @@
                         <a:buNone/>
                       </a:pPr>
                       <a:r>
-                        <a:rPr lang="en-US" sz="1200" dirty="0">
+                        <a:rPr lang="en-US" sz="1400" dirty="0">
                           <a:solidFill>
                             <a:srgbClr val="1F2429"/>
                           </a:solidFill>
@@ -9485,7 +10072,7 @@
                         <a:buNone/>
                       </a:pPr>
                       <a:r>
-                        <a:rPr lang="en-US" sz="1200" dirty="0">
+                        <a:rPr lang="en-US" sz="1400" dirty="0">
                           <a:solidFill>
                             <a:srgbClr val="1F2429"/>
                           </a:solidFill>
@@ -9545,7 +10132,7 @@
                   </a:tcPr>
                 </a:tc>
               </a:tr>
-              <a:tr h="502920">
+              <a:tr h="330000">
                 <a:tc>
                   <a:txBody>
                     <a:bodyPr/>
@@ -9555,7 +10142,7 @@
                         <a:buNone/>
                       </a:pPr>
                       <a:r>
-                        <a:rPr lang="en-US" sz="1200" dirty="0">
+                        <a:rPr lang="en-US" sz="1400" dirty="0">
                           <a:solidFill>
                             <a:srgbClr val="1F2429"/>
                           </a:solidFill>
@@ -9623,7 +10210,7 @@
                         <a:buNone/>
                       </a:pPr>
                       <a:r>
-                        <a:rPr lang="en-US" sz="1200" dirty="0">
+                        <a:rPr lang="en-US" sz="1400" dirty="0">
                           <a:solidFill>
                             <a:srgbClr val="1F2429"/>
                           </a:solidFill>
@@ -9691,7 +10278,7 @@
                         <a:buNone/>
                       </a:pPr>
                       <a:r>
-                        <a:rPr lang="en-US" sz="1200" dirty="0">
+                        <a:rPr lang="en-US" sz="1400" dirty="0">
                           <a:solidFill>
                             <a:srgbClr val="1F2429"/>
                           </a:solidFill>
@@ -9751,7 +10338,7 @@
                   </a:tcPr>
                 </a:tc>
               </a:tr>
-              <a:tr h="502920">
+              <a:tr h="330000">
                 <a:tc>
                   <a:txBody>
                     <a:bodyPr/>
@@ -9761,7 +10348,7 @@
                         <a:buNone/>
                       </a:pPr>
                       <a:r>
-                        <a:rPr lang="en-US" sz="1200" dirty="0">
+                        <a:rPr lang="en-US" sz="1400" dirty="0">
                           <a:solidFill>
                             <a:srgbClr val="1F2429"/>
                           </a:solidFill>
@@ -9829,7 +10416,7 @@
                         <a:buNone/>
                       </a:pPr>
                       <a:r>
-                        <a:rPr lang="en-US" sz="1200" dirty="0">
+                        <a:rPr lang="en-US" sz="1400" dirty="0">
                           <a:solidFill>
                             <a:srgbClr val="1F2429"/>
                           </a:solidFill>
@@ -9897,7 +10484,7 @@
                         <a:buNone/>
                       </a:pPr>
                       <a:r>
-                        <a:rPr lang="en-US" sz="1200" dirty="0">
+                        <a:rPr lang="en-US" sz="1400" dirty="0">
                           <a:solidFill>
                             <a:srgbClr val="1F2429"/>
                           </a:solidFill>
@@ -9969,8 +10556,8 @@
         </p:nvSpPr>
         <p:spPr>
           <a:xfrm>
-            <a:off x="640080" y="5074920"/>
-            <a:ext cx="10911535" cy="1005840"/>
+            <a:off x="640080" y="5250000"/>
+            <a:ext cx="10911535" cy="1100000"/>
           </a:xfrm>
           <a:prstGeom prst="rect">
             <a:avLst/>
@@ -9989,7 +10576,7 @@
               <a:buNone/>
             </a:pPr>
             <a:r>
-              <a:rPr lang="en-US" sz="1250" b="1" dirty="0">
+              <a:rPr lang="en-US" sz="1800" b="1" dirty="0">
                 <a:solidFill>
                   <a:srgbClr val="E8A33D"/>
                 </a:solidFill>
@@ -10006,7 +10593,7 @@
               <a:buNone/>
             </a:pPr>
             <a:r>
-              <a:rPr lang="en-US" sz="1250" dirty="0">
+              <a:rPr lang="en-US" sz="1800" dirty="0">
                 <a:solidFill>
                   <a:srgbClr val="1F2429"/>
                 </a:solidFill>
@@ -10045,7 +10632,7 @@
               <a:buNone/>
             </a:pPr>
             <a:r>
-              <a:rPr lang="en-US" sz="1000" u="sng" dirty="0">
+              <a:rPr lang="en-US" sz="1200" u="sng" dirty="0">
                 <a:solidFill>
                   <a:srgbClr val="8A939B"/>
                 </a:solidFill>
@@ -10066,7 +10653,7 @@
               <a:buNone/>
             </a:pPr>
             <a:r>
-              <a:rPr lang="en-US" sz="1000" dirty="0">
+              <a:rPr lang="en-US" sz="1200" dirty="0">
                 <a:solidFill>
                   <a:srgbClr val="8A939B"/>
                 </a:solidFill>
@@ -10192,7 +10779,7 @@
       </p:sp>
       <p:graphicFrame>
         <p:nvGraphicFramePr>
-          <p:cNvPr id="8" name="Table 0"/>
+          <p:cNvPr id="4" name="Table 0"/>
           <p:cNvGraphicFramePr>
             <a:graphicFrameLocks noGrp="1"/>
           </p:cNvGraphicFramePr>
@@ -10206,7 +10793,7 @@
         </p:nvGraphicFramePr>
         <p:xfrm>
           <a:off x="640080" y="1508760"/>
-          <a:ext cx="10911535" cy="914400"/>
+          <a:ext cx="10911535" cy="2520000"/>
         </p:xfrm>
         <a:graphic>
           <a:graphicData uri="http://schemas.openxmlformats.org/drawingml/2006/table">
@@ -10217,7 +10804,7 @@
                 <a:gridCol w="4572000"/>
                 <a:gridCol w="4325112"/>
               </a:tblGrid>
-              <a:tr h="530352">
+              <a:tr h="360000">
                 <a:tc>
                   <a:txBody>
                     <a:bodyPr/>
@@ -10284,7 +10871,7 @@
                         <a:buNone/>
                       </a:pPr>
                       <a:r>
-                        <a:rPr lang="en-US" sz="1150" b="1" dirty="0">
+                        <a:rPr lang="en-US" sz="1400" b="1" dirty="0">
                           <a:solidFill>
                             <a:srgbClr val="FFFFFF"/>
                           </a:solidFill>
@@ -10352,7 +10939,7 @@
                         <a:buNone/>
                       </a:pPr>
                       <a:r>
-                        <a:rPr lang="en-US" sz="1150" b="1" dirty="0">
+                        <a:rPr lang="en-US" sz="1400" b="1" dirty="0">
                           <a:solidFill>
                             <a:srgbClr val="FFFFFF"/>
                           </a:solidFill>
@@ -10412,7 +10999,7 @@
                   </a:tcPr>
                 </a:tc>
               </a:tr>
-              <a:tr h="530352">
+              <a:tr h="360000">
                 <a:tc>
                   <a:txBody>
                     <a:bodyPr/>
@@ -10422,7 +11009,7 @@
                         <a:buNone/>
                       </a:pPr>
                       <a:r>
-                        <a:rPr lang="en-US" sz="1150" dirty="0">
+                        <a:rPr lang="en-US" sz="1400" dirty="0">
                           <a:solidFill>
                             <a:srgbClr val="1F2429"/>
                           </a:solidFill>
@@ -10490,7 +11077,7 @@
                         <a:buNone/>
                       </a:pPr>
                       <a:r>
-                        <a:rPr lang="en-US" sz="1150" dirty="0">
+                        <a:rPr lang="en-US" sz="1400" dirty="0">
                           <a:solidFill>
                             <a:srgbClr val="1F2429"/>
                           </a:solidFill>
@@ -10558,7 +11145,7 @@
                         <a:buNone/>
                       </a:pPr>
                       <a:r>
-                        <a:rPr lang="en-US" sz="1150" dirty="0">
+                        <a:rPr lang="en-US" sz="1400" dirty="0">
                           <a:solidFill>
                             <a:srgbClr val="1F2429"/>
                           </a:solidFill>
@@ -10618,7 +11205,7 @@
                   </a:tcPr>
                 </a:tc>
               </a:tr>
-              <a:tr h="530352">
+              <a:tr h="360000">
                 <a:tc>
                   <a:txBody>
                     <a:bodyPr/>
@@ -10628,7 +11215,7 @@
                         <a:buNone/>
                       </a:pPr>
                       <a:r>
-                        <a:rPr lang="en-US" sz="1150" dirty="0">
+                        <a:rPr lang="en-US" sz="1400" dirty="0">
                           <a:solidFill>
                             <a:srgbClr val="1F2429"/>
                           </a:solidFill>
@@ -10696,7 +11283,7 @@
                         <a:buNone/>
                       </a:pPr>
                       <a:r>
-                        <a:rPr lang="en-US" sz="1150" dirty="0">
+                        <a:rPr lang="en-US" sz="1400" dirty="0">
                           <a:solidFill>
                             <a:srgbClr val="1F2429"/>
                           </a:solidFill>
@@ -10764,7 +11351,7 @@
                         <a:buNone/>
                       </a:pPr>
                       <a:r>
-                        <a:rPr lang="en-US" sz="1150" dirty="0">
+                        <a:rPr lang="en-US" sz="1400" dirty="0">
                           <a:solidFill>
                             <a:srgbClr val="1F2429"/>
                           </a:solidFill>
@@ -10824,7 +11411,7 @@
                   </a:tcPr>
                 </a:tc>
               </a:tr>
-              <a:tr h="530352">
+              <a:tr h="360000">
                 <a:tc>
                   <a:txBody>
                     <a:bodyPr/>
@@ -10834,7 +11421,7 @@
                         <a:buNone/>
                       </a:pPr>
                       <a:r>
-                        <a:rPr lang="en-US" sz="1150" dirty="0">
+                        <a:rPr lang="en-US" sz="1400" dirty="0">
                           <a:solidFill>
                             <a:srgbClr val="1F2429"/>
                           </a:solidFill>
@@ -10902,7 +11489,7 @@
                         <a:buNone/>
                       </a:pPr>
                       <a:r>
-                        <a:rPr lang="en-US" sz="1150" dirty="0">
+                        <a:rPr lang="en-US" sz="1400" dirty="0">
                           <a:solidFill>
                             <a:srgbClr val="1F2429"/>
                           </a:solidFill>
@@ -10970,7 +11557,7 @@
                         <a:buNone/>
                       </a:pPr>
                       <a:r>
-                        <a:rPr lang="en-US" sz="1150" dirty="0">
+                        <a:rPr lang="en-US" sz="1400" dirty="0">
                           <a:solidFill>
                             <a:srgbClr val="1F2429"/>
                           </a:solidFill>
@@ -11030,7 +11617,7 @@
                   </a:tcPr>
                 </a:tc>
               </a:tr>
-              <a:tr h="530352">
+              <a:tr h="360000">
                 <a:tc>
                   <a:txBody>
                     <a:bodyPr/>
@@ -11040,7 +11627,7 @@
                         <a:buNone/>
                       </a:pPr>
                       <a:r>
-                        <a:rPr lang="en-US" sz="1150" dirty="0">
+                        <a:rPr lang="en-US" sz="1400" dirty="0">
                           <a:solidFill>
                             <a:srgbClr val="1F2429"/>
                           </a:solidFill>
@@ -11108,7 +11695,7 @@
                         <a:buNone/>
                       </a:pPr>
                       <a:r>
-                        <a:rPr lang="en-US" sz="1150" dirty="0">
+                        <a:rPr lang="en-US" sz="1400" dirty="0">
                           <a:solidFill>
                             <a:srgbClr val="1F2429"/>
                           </a:solidFill>
@@ -11176,7 +11763,7 @@
                         <a:buNone/>
                       </a:pPr>
                       <a:r>
-                        <a:rPr lang="en-US" sz="1150" dirty="0">
+                        <a:rPr lang="en-US" sz="1400" dirty="0">
                           <a:solidFill>
                             <a:srgbClr val="1F2429"/>
                           </a:solidFill>
@@ -11236,7 +11823,7 @@
                   </a:tcPr>
                 </a:tc>
               </a:tr>
-              <a:tr h="530352">
+              <a:tr h="360000">
                 <a:tc>
                   <a:txBody>
                     <a:bodyPr/>
@@ -11246,7 +11833,7 @@
                         <a:buNone/>
                       </a:pPr>
                       <a:r>
-                        <a:rPr lang="en-US" sz="1150" dirty="0">
+                        <a:rPr lang="en-US" sz="1400" dirty="0">
                           <a:solidFill>
                             <a:srgbClr val="1F2429"/>
                           </a:solidFill>
@@ -11314,7 +11901,7 @@
                         <a:buNone/>
                       </a:pPr>
                       <a:r>
-                        <a:rPr lang="en-US" sz="1150" dirty="0">
+                        <a:rPr lang="en-US" sz="1400" dirty="0">
                           <a:solidFill>
                             <a:srgbClr val="1F2429"/>
                           </a:solidFill>
@@ -11382,7 +11969,7 @@
                         <a:buNone/>
                       </a:pPr>
                       <a:r>
-                        <a:rPr lang="en-US" sz="1150" dirty="0">
+                        <a:rPr lang="en-US" sz="1400" dirty="0">
                           <a:solidFill>
                             <a:srgbClr val="1F2429"/>
                           </a:solidFill>
@@ -11442,7 +12029,7 @@
                   </a:tcPr>
                 </a:tc>
               </a:tr>
-              <a:tr h="530352">
+              <a:tr h="360000">
                 <a:tc>
                   <a:txBody>
                     <a:bodyPr/>
@@ -11452,7 +12039,7 @@
                         <a:buNone/>
                       </a:pPr>
                       <a:r>
-                        <a:rPr lang="en-US" sz="1150" dirty="0">
+                        <a:rPr lang="en-US" sz="1400" dirty="0">
                           <a:solidFill>
                             <a:srgbClr val="1F2429"/>
                           </a:solidFill>
@@ -11520,7 +12107,7 @@
                         <a:buNone/>
                       </a:pPr>
                       <a:r>
-                        <a:rPr lang="en-US" sz="1150" dirty="0">
+                        <a:rPr lang="en-US" sz="1400" dirty="0">
                           <a:solidFill>
                             <a:srgbClr val="1F2429"/>
                           </a:solidFill>
@@ -11588,7 +12175,7 @@
                         <a:buNone/>
                       </a:pPr>
                       <a:r>
-                        <a:rPr lang="en-US" sz="1150" dirty="0">
+                        <a:rPr lang="en-US" sz="1400" dirty="0">
                           <a:solidFill>
                             <a:srgbClr val="1F2429"/>
                           </a:solidFill>
@@ -11660,8 +12247,8 @@
         </p:nvSpPr>
         <p:spPr>
           <a:xfrm>
-            <a:off x="640080" y="5166360"/>
-            <a:ext cx="10911535" cy="960120"/>
+            <a:off x="640080" y="5450000"/>
+            <a:ext cx="10911535" cy="900000"/>
           </a:xfrm>
           <a:prstGeom prst="roundRect">
             <a:avLst>
@@ -11678,6 +12265,10 @@
             <a:prstDash val="solid"/>
           </a:ln>
         </p:spPr>
+        <p:txBody>
+          <a:bodyPr/>
+          <a:p/>
+        </p:txBody>
       </p:sp>
       <p:sp>
         <p:nvSpPr>
@@ -11687,7 +12278,7 @@
         </p:nvSpPr>
         <p:spPr>
           <a:xfrm>
-            <a:off x="896112" y="5312664"/>
+            <a:off x="896112" y="5520000"/>
             <a:ext cx="10399471" cy="274320"/>
           </a:xfrm>
           <a:prstGeom prst="rect">
@@ -11704,7 +12295,7 @@
               <a:buNone/>
             </a:pPr>
             <a:r>
-              <a:rPr lang="en-US" sz="1100" b="1" spc="200" kern="0" dirty="0">
+              <a:rPr lang="en-US" sz="1200" b="1" spc="200" kern="0" dirty="0">
                 <a:solidFill>
                   <a:srgbClr val="0E7A61"/>
                 </a:solidFill>
@@ -11726,8 +12317,8 @@
         </p:nvSpPr>
         <p:spPr>
           <a:xfrm>
-            <a:off x="896112" y="5623560"/>
-            <a:ext cx="10399471" cy="338328"/>
+            <a:off x="896112" y="5790000"/>
+            <a:ext cx="10399471" cy="560000"/>
           </a:xfrm>
           <a:prstGeom prst="rect">
             <a:avLst/>
@@ -11746,7 +12337,7 @@
               <a:buNone/>
             </a:pPr>
             <a:r>
-              <a:rPr lang="en-US" sz="1300" dirty="0">
+              <a:rPr lang="en-US" sz="1800" dirty="0">
                 <a:solidFill>
                   <a:srgbClr val="1F2429"/>
                 </a:solidFill>
@@ -11754,7 +12345,7 @@
                 <a:ea typeface="Calibri" pitchFamily="34" charset="-122"/>
                 <a:cs typeface="Calibri" pitchFamily="34" charset="-120"/>
               </a:rPr>
-              <a:t>The fastest way to check a TRC formula: write the algebra expression you trust first, then translate operator by operator — σ becomes a conjunct, π becomes which attributes you keep, a join becomes an existentially-quantified tuple variable.</a:t>
+              <a:t>Write the algebra you trust first, then translate operator by operator into TRC.</a:t>
             </a:r>
             <a:endParaRPr lang="en-US" sz="1300" dirty="0"/>
           </a:p>
@@ -11785,7 +12376,7 @@
               <a:buNone/>
             </a:pPr>
             <a:r>
-              <a:rPr lang="en-US" sz="1000" u="sng" dirty="0">
+              <a:rPr lang="en-US" sz="1200" u="sng" dirty="0">
                 <a:solidFill>
                   <a:srgbClr val="8A939B"/>
                 </a:solidFill>
@@ -11806,7 +12397,7 @@
               <a:buNone/>
             </a:pPr>
             <a:r>
-              <a:rPr lang="en-US" sz="1000" dirty="0">
+              <a:rPr lang="en-US" sz="1200" dirty="0">
                 <a:solidFill>
                   <a:srgbClr val="8A939B"/>
                 </a:solidFill>
@@ -11962,7 +12553,7 @@
               <a:buChar char="•"/>
             </a:pPr>
             <a:r>
-              <a:rPr lang="en-US" sz="1300" dirty="0">
+              <a:rPr lang="en-US" sz="1800" dirty="0">
                 <a:solidFill>
                   <a:srgbClr val="1F2429"/>
                 </a:solidFill>
@@ -11986,7 +12577,7 @@
               <a:buChar char="•"/>
             </a:pPr>
             <a:r>
-              <a:rPr lang="en-US" sz="1300" dirty="0">
+              <a:rPr lang="en-US" sz="1800" dirty="0">
                 <a:solidFill>
                   <a:srgbClr val="1F2429"/>
                 </a:solidFill>
@@ -12010,7 +12601,7 @@
               <a:buChar char="•"/>
             </a:pPr>
             <a:r>
-              <a:rPr lang="en-US" sz="1300" dirty="0">
+              <a:rPr lang="en-US" sz="1800" dirty="0">
                 <a:solidFill>
                   <a:srgbClr val="1F2429"/>
                 </a:solidFill>
@@ -12050,6 +12641,10 @@
             <a:prstDash val="solid"/>
           </a:ln>
         </p:spPr>
+        <p:txBody>
+          <a:bodyPr/>
+          <a:p/>
+        </p:txBody>
       </p:sp>
       <p:sp>
         <p:nvSpPr>
@@ -12072,6 +12667,10 @@
           </a:solidFill>
           <a:ln/>
         </p:spPr>
+        <p:txBody>
+          <a:bodyPr/>
+          <a:p/>
+        </p:txBody>
       </p:sp>
       <p:sp>
         <p:nvSpPr>
@@ -12092,6 +12691,10 @@
           </a:solidFill>
           <a:ln/>
         </p:spPr>
+        <p:txBody>
+          <a:bodyPr/>
+          <a:p/>
+        </p:txBody>
       </p:sp>
       <p:sp>
         <p:nvSpPr>
@@ -12118,7 +12721,7 @@
               <a:buNone/>
             </a:pPr>
             <a:r>
-              <a:rPr lang="en-US" sz="1300" b="1" dirty="0">
+              <a:rPr lang="en-US" sz="1800" b="1" dirty="0">
                 <a:solidFill>
                   <a:srgbClr val="14181C"/>
                 </a:solidFill>
@@ -12163,7 +12766,7 @@
               <a:buNone/>
             </a:pPr>
             <a:r>
-              <a:rPr lang="en-US" sz="1150" b="1" u="sng" dirty="0">
+              <a:rPr lang="en-US" sz="1800" b="1" u="sng" dirty="0">
                 <a:solidFill>
                   <a:srgbClr val="1F2429"/>
                 </a:solidFill>
@@ -12186,7 +12789,7 @@
               <a:buNone/>
             </a:pPr>
             <a:r>
-              <a:rPr lang="en-US" sz="1150" dirty="0">
+              <a:rPr lang="en-US" sz="1800" dirty="0">
                 <a:solidFill>
                   <a:srgbClr val="1F2429"/>
                 </a:solidFill>
@@ -12226,6 +12829,10 @@
             <a:prstDash val="solid"/>
           </a:ln>
         </p:spPr>
+        <p:txBody>
+          <a:bodyPr/>
+          <a:p/>
+        </p:txBody>
       </p:sp>
       <p:sp>
         <p:nvSpPr>
@@ -12248,6 +12855,10 @@
           </a:solidFill>
           <a:ln/>
         </p:spPr>
+        <p:txBody>
+          <a:bodyPr/>
+          <a:p/>
+        </p:txBody>
       </p:sp>
       <p:sp>
         <p:nvSpPr>
@@ -12268,6 +12879,10 @@
           </a:solidFill>
           <a:ln/>
         </p:spPr>
+        <p:txBody>
+          <a:bodyPr/>
+          <a:p/>
+        </p:txBody>
       </p:sp>
       <p:sp>
         <p:nvSpPr>
@@ -12294,7 +12909,7 @@
               <a:buNone/>
             </a:pPr>
             <a:r>
-              <a:rPr lang="en-US" sz="1300" b="1" dirty="0">
+              <a:rPr lang="en-US" sz="1800" b="1" dirty="0">
                 <a:solidFill>
                   <a:srgbClr val="14181C"/>
                 </a:solidFill>
@@ -12339,7 +12954,7 @@
               <a:buNone/>
             </a:pPr>
             <a:r>
-              <a:rPr lang="en-US" sz="1150" b="1" u="sng" dirty="0">
+              <a:rPr lang="en-US" sz="1800" b="1" u="sng" dirty="0">
                 <a:solidFill>
                   <a:srgbClr val="1F2429"/>
                 </a:solidFill>
@@ -12362,7 +12977,7 @@
               <a:buNone/>
             </a:pPr>
             <a:r>
-              <a:rPr lang="en-US" sz="1150" i="1" dirty="0">
+              <a:rPr lang="en-US" sz="1800" i="1" dirty="0">
                 <a:solidFill>
                   <a:srgbClr val="5B6470"/>
                 </a:solidFill>
@@ -12398,6 +13013,10 @@
             <a:prstDash val="solid"/>
           </a:ln>
         </p:spPr>
+        <p:txBody>
+          <a:bodyPr/>
+          <a:p/>
+        </p:txBody>
       </p:sp>
       <p:sp>
         <p:nvSpPr>
@@ -12426,7 +13045,7 @@
               <a:buNone/>
             </a:pPr>
             <a:r>
-              <a:rPr lang="en-US" sz="1100" i="1" dirty="0">
+              <a:rPr lang="en-US" sz="1800" i="1" dirty="0">
                 <a:solidFill>
                   <a:srgbClr val="1F2429"/>
                 </a:solidFill>
@@ -12459,6 +13078,10 @@
           </a:solidFill>
           <a:ln/>
         </p:spPr>
+        <p:txBody>
+          <a:bodyPr/>
+          <a:p/>
+        </p:txBody>
       </p:sp>
       <p:sp>
         <p:nvSpPr>
@@ -12518,6 +13141,10 @@
           </a:solidFill>
           <a:ln/>
         </p:spPr>
+        <p:txBody>
+          <a:bodyPr/>
+          <a:p/>
+        </p:txBody>
       </p:sp>
       <p:sp>
         <p:nvSpPr>
@@ -12586,7 +13213,7 @@
               <a:buNone/>
             </a:pPr>
             <a:r>
-              <a:rPr lang="en-US" sz="1250" dirty="0">
+              <a:rPr lang="en-US" sz="1800" dirty="0">
                 <a:solidFill>
                   <a:srgbClr val="1F2429"/>
                 </a:solidFill>
@@ -12625,7 +13252,7 @@
               <a:buNone/>
             </a:pPr>
             <a:r>
-              <a:rPr lang="en-US" sz="1000" u="sng" dirty="0">
+              <a:rPr lang="en-US" sz="1200" u="sng" dirty="0">
                 <a:solidFill>
                   <a:srgbClr val="8A939B"/>
                 </a:solidFill>
@@ -12646,7 +13273,7 @@
               <a:buNone/>
             </a:pPr>
             <a:r>
-              <a:rPr lang="en-US" sz="1000" dirty="0">
+              <a:rPr lang="en-US" sz="1200" dirty="0">
                 <a:solidFill>
                   <a:srgbClr val="8A939B"/>
                 </a:solidFill>
@@ -12772,7 +13399,7 @@
       </p:sp>
       <p:graphicFrame>
         <p:nvGraphicFramePr>
-          <p:cNvPr id="10" name="Table 0"/>
+          <p:cNvPr id="4" name="Table 0"/>
           <p:cNvGraphicFramePr>
             <a:graphicFrameLocks noGrp="1"/>
           </p:cNvGraphicFramePr>
@@ -12807,7 +13434,7 @@
                         <a:buNone/>
                       </a:pPr>
                       <a:r>
-                        <a:rPr lang="en-US" sz="1050" b="1" dirty="0">
+                        <a:rPr lang="en-US" sz="1400" b="1" dirty="0">
                           <a:solidFill>
                             <a:srgbClr val="FFFFFF"/>
                           </a:solidFill>
@@ -12875,7 +13502,7 @@
                         <a:buNone/>
                       </a:pPr>
                       <a:r>
-                        <a:rPr lang="en-US" sz="1050" b="1" dirty="0">
+                        <a:rPr lang="en-US" sz="1400" b="1" dirty="0">
                           <a:solidFill>
                             <a:srgbClr val="FFFFFF"/>
                           </a:solidFill>
@@ -12943,7 +13570,7 @@
                         <a:buNone/>
                       </a:pPr>
                       <a:r>
-                        <a:rPr lang="en-US" sz="1050" b="1" dirty="0">
+                        <a:rPr lang="en-US" sz="1400" b="1" dirty="0">
                           <a:solidFill>
                             <a:srgbClr val="FFFFFF"/>
                           </a:solidFill>
@@ -13013,7 +13640,7 @@
                         <a:buNone/>
                       </a:pPr>
                       <a:r>
-                        <a:rPr lang="en-US" sz="1050" dirty="0">
+                        <a:rPr lang="en-US" sz="1400" dirty="0">
                           <a:solidFill>
                             <a:srgbClr val="1F2429"/>
                           </a:solidFill>
@@ -13081,7 +13708,7 @@
                         <a:buNone/>
                       </a:pPr>
                       <a:r>
-                        <a:rPr lang="en-US" sz="1050" dirty="0">
+                        <a:rPr lang="en-US" sz="1400" dirty="0">
                           <a:solidFill>
                             <a:srgbClr val="1F2429"/>
                           </a:solidFill>
@@ -13149,7 +13776,7 @@
                         <a:buNone/>
                       </a:pPr>
                       <a:r>
-                        <a:rPr lang="en-US" sz="1050" dirty="0">
+                        <a:rPr lang="en-US" sz="1400" dirty="0">
                           <a:solidFill>
                             <a:srgbClr val="1F2429"/>
                           </a:solidFill>
@@ -13219,7 +13846,7 @@
                         <a:buNone/>
                       </a:pPr>
                       <a:r>
-                        <a:rPr lang="en-US" sz="1050" dirty="0">
+                        <a:rPr lang="en-US" sz="1400" dirty="0">
                           <a:solidFill>
                             <a:srgbClr val="1F2429"/>
                           </a:solidFill>
@@ -13287,7 +13914,7 @@
                         <a:buNone/>
                       </a:pPr>
                       <a:r>
-                        <a:rPr lang="en-US" sz="1050" dirty="0">
+                        <a:rPr lang="en-US" sz="1400" dirty="0">
                           <a:solidFill>
                             <a:srgbClr val="1F2429"/>
                           </a:solidFill>
@@ -13355,7 +13982,7 @@
                         <a:buNone/>
                       </a:pPr>
                       <a:r>
-                        <a:rPr lang="en-US" sz="1050" dirty="0">
+                        <a:rPr lang="en-US" sz="1400" dirty="0">
                           <a:solidFill>
                             <a:srgbClr val="1F2429"/>
                           </a:solidFill>
@@ -13425,7 +14052,7 @@
                         <a:buNone/>
                       </a:pPr>
                       <a:r>
-                        <a:rPr lang="en-US" sz="1050" dirty="0">
+                        <a:rPr lang="en-US" sz="1400" dirty="0">
                           <a:solidFill>
                             <a:srgbClr val="1F2429"/>
                           </a:solidFill>
@@ -13493,7 +14120,7 @@
                         <a:buNone/>
                       </a:pPr>
                       <a:r>
-                        <a:rPr lang="en-US" sz="1050" dirty="0">
+                        <a:rPr lang="en-US" sz="1400" dirty="0">
                           <a:solidFill>
                             <a:srgbClr val="1F2429"/>
                           </a:solidFill>
@@ -13561,7 +14188,7 @@
                         <a:buNone/>
                       </a:pPr>
                       <a:r>
-                        <a:rPr lang="en-US" sz="1050" dirty="0">
+                        <a:rPr lang="en-US" sz="1400" dirty="0">
                           <a:solidFill>
                             <a:srgbClr val="1F2429"/>
                           </a:solidFill>
@@ -13631,7 +14258,7 @@
                         <a:buNone/>
                       </a:pPr>
                       <a:r>
-                        <a:rPr lang="en-US" sz="1050" dirty="0">
+                        <a:rPr lang="en-US" sz="1400" dirty="0">
                           <a:solidFill>
                             <a:srgbClr val="1F2429"/>
                           </a:solidFill>
@@ -13699,7 +14326,7 @@
                         <a:buNone/>
                       </a:pPr>
                       <a:r>
-                        <a:rPr lang="en-US" sz="1050" dirty="0">
+                        <a:rPr lang="en-US" sz="1400" dirty="0">
                           <a:solidFill>
                             <a:srgbClr val="1F2429"/>
                           </a:solidFill>
@@ -13767,7 +14394,7 @@
                         <a:buNone/>
                       </a:pPr>
                       <a:r>
-                        <a:rPr lang="en-US" sz="1050" dirty="0">
+                        <a:rPr lang="en-US" sz="1400" dirty="0">
                           <a:solidFill>
                             <a:srgbClr val="1F2429"/>
                           </a:solidFill>
@@ -13837,7 +14464,7 @@
                         <a:buNone/>
                       </a:pPr>
                       <a:r>
-                        <a:rPr lang="en-US" sz="1050" dirty="0">
+                        <a:rPr lang="en-US" sz="1400" dirty="0">
                           <a:solidFill>
                             <a:srgbClr val="1F2429"/>
                           </a:solidFill>
@@ -13905,7 +14532,7 @@
                         <a:buNone/>
                       </a:pPr>
                       <a:r>
-                        <a:rPr lang="en-US" sz="1050" dirty="0">
+                        <a:rPr lang="en-US" sz="1400" dirty="0">
                           <a:solidFill>
                             <a:srgbClr val="1F2429"/>
                           </a:solidFill>
@@ -13973,7 +14600,7 @@
                         <a:buNone/>
                       </a:pPr>
                       <a:r>
-                        <a:rPr lang="en-US" sz="1050" dirty="0">
+                        <a:rPr lang="en-US" sz="1400" dirty="0">
                           <a:solidFill>
                             <a:srgbClr val="1F2429"/>
                           </a:solidFill>
@@ -14043,7 +14670,7 @@
                         <a:buNone/>
                       </a:pPr>
                       <a:r>
-                        <a:rPr lang="en-US" sz="1050" dirty="0">
+                        <a:rPr lang="en-US" sz="1400" dirty="0">
                           <a:solidFill>
                             <a:srgbClr val="1F2429"/>
                           </a:solidFill>
@@ -14111,7 +14738,7 @@
                         <a:buNone/>
                       </a:pPr>
                       <a:r>
-                        <a:rPr lang="en-US" sz="1050" dirty="0">
+                        <a:rPr lang="en-US" sz="1400" dirty="0">
                           <a:solidFill>
                             <a:srgbClr val="1F2429"/>
                           </a:solidFill>
@@ -14179,7 +14806,7 @@
                         <a:buNone/>
                       </a:pPr>
                       <a:r>
-                        <a:rPr lang="en-US" sz="1050" dirty="0">
+                        <a:rPr lang="en-US" sz="1400" dirty="0">
                           <a:solidFill>
                             <a:srgbClr val="1F2429"/>
                           </a:solidFill>
@@ -14249,7 +14876,7 @@
                         <a:buNone/>
                       </a:pPr>
                       <a:r>
-                        <a:rPr lang="en-US" sz="1050" dirty="0">
+                        <a:rPr lang="en-US" sz="1400" dirty="0">
                           <a:solidFill>
                             <a:srgbClr val="1F2429"/>
                           </a:solidFill>
@@ -14317,7 +14944,7 @@
                         <a:buNone/>
                       </a:pPr>
                       <a:r>
-                        <a:rPr lang="en-US" sz="1050" dirty="0">
+                        <a:rPr lang="en-US" sz="1400" dirty="0">
                           <a:solidFill>
                             <a:srgbClr val="1F2429"/>
                           </a:solidFill>
@@ -14385,7 +15012,7 @@
                         <a:buNone/>
                       </a:pPr>
                       <a:r>
-                        <a:rPr lang="en-US" sz="1050" dirty="0">
+                        <a:rPr lang="en-US" sz="1400" dirty="0">
                           <a:solidFill>
                             <a:srgbClr val="1F2429"/>
                           </a:solidFill>
@@ -14474,7 +15101,7 @@
               <a:buNone/>
             </a:pPr>
             <a:r>
-              <a:rPr lang="en-US" sz="1000" u="sng" dirty="0">
+              <a:rPr lang="en-US" sz="1200" u="sng" dirty="0">
                 <a:solidFill>
                   <a:srgbClr val="8A939B"/>
                 </a:solidFill>
@@ -14495,7 +15122,7 @@
               <a:buNone/>
             </a:pPr>
             <a:r>
-              <a:rPr lang="en-US" sz="1000" dirty="0">
+              <a:rPr lang="en-US" sz="1200" dirty="0">
                 <a:solidFill>
                   <a:srgbClr val="8A939B"/>
                 </a:solidFill>
